--- a/Topic_E/Exam_Practice/TE-L10_Speaking_Workshop_International_Life_and_Global_Connections.pptx
+++ b/Topic_E/Exam_Practice/TE-L10_Speaking_Workshop_International_Life_and_Global_Connections.pptx
@@ -615,7 +615,11 @@
           <a:lstStyle/>
           <a:p>
             <a:r>
-              <a:rPr lang="en-US" dirty="0"/>
+              <a:rPr lang="ar-SA" dirty="0">
+                <a:latin typeface="Amiri" pitchFamily="2" charset="-78"/>
+                <a:ea typeface="Amiri" pitchFamily="2" charset="-78"/>
+                <a:cs typeface="Amiri" pitchFamily="2" charset="-78"/>
+              </a:rPr>
               <a:t>ROLE PLAY C (Develop) — at home.
 SET-UP IN THE BREAKOUT ROOM: A = examiner (reads the left column ONLY — the questions, in order), B = candidate (sees the task column; Core may use the help column), C = observer (ticks the feedback checklist). 1 minute preparation, about 3 minutes speaking, 1 minute feedback, then rotate.
 Task ! is the unexpected question: in the exam the candidate has not seen it — the examiner should read it without warning.
@@ -707,7 +711,11 @@
           <a:lstStyle/>
           <a:p>
             <a:r>
-              <a:rPr lang="en-US" dirty="0"/>
+              <a:rPr lang="ar-SA" dirty="0">
+                <a:latin typeface="Amiri" pitchFamily="2" charset="-78"/>
+                <a:ea typeface="Amiri" pitchFamily="2" charset="-78"/>
+                <a:cs typeface="Amiri" pitchFamily="2" charset="-78"/>
+              </a:rPr>
               <a:t>ROLE PLAY D (Stretch) — an international youth summit.
 SET-UP IN THE BREAKOUT ROOM: A = examiner (reads the left column ONLY — the questions, in order), B = candidate (sees the task column; Core may use the help column), C = observer (ticks the feedback checklist). 1 minute preparation, about 3 minutes speaking, 1 minute feedback, then rotate.
 Task ! is the unexpected question: in the exam the candidate has not seen it — the examiner should read it without warning.
@@ -1243,7 +1251,11 @@
           <a:lstStyle/>
           <a:p>
             <a:r>
-              <a:rPr lang="en-US" dirty="0"/>
+              <a:rPr lang="ar-SA" dirty="0">
+                <a:latin typeface="Amiri" pitchFamily="2" charset="-78"/>
+                <a:ea typeface="Amiri" pitchFamily="2" charset="-78"/>
+                <a:cs typeface="Amiri" pitchFamily="2" charset="-78"/>
+              </a:rPr>
               <a:t>TOPIC CONVERSATION — Core. Examiner asks the questions in order and may add “لِمَاذَا؟ / هَلْ يُمْكِنُ أَنْ تَشْرَحَ أَكْثَرَ؟” to push for more. Candidate aims for one full sentence per question.
 </a:t>
             </a:r>
@@ -1332,7 +1344,11 @@
           <a:lstStyle/>
           <a:p>
             <a:r>
-              <a:rPr lang="en-US" dirty="0"/>
+              <a:rPr lang="ar-SA" dirty="0">
+                <a:latin typeface="Amiri" pitchFamily="2" charset="-78"/>
+                <a:ea typeface="Amiri" pitchFamily="2" charset="-78"/>
+                <a:cs typeface="Amiri" pitchFamily="2" charset="-78"/>
+              </a:rPr>
               <a:t>TOPIC CONVERSATION — Develop. Examiner asks the questions in order and may add “لِمَاذَا؟ / هَلْ يُمْكِنُ أَنْ تَشْرَحَ أَكْثَرَ؟” to push for more. Candidate aims for two or three sentences, with a conditional and a passive.
 </a:t>
             </a:r>
@@ -1421,7 +1437,11 @@
           <a:lstStyle/>
           <a:p>
             <a:r>
-              <a:rPr lang="en-US" dirty="0"/>
+              <a:rPr lang="ar-SA" dirty="0">
+                <a:latin typeface="Amiri" pitchFamily="2" charset="-78"/>
+                <a:ea typeface="Amiri" pitchFamily="2" charset="-78"/>
+                <a:cs typeface="Amiri" pitchFamily="2" charset="-78"/>
+              </a:rPr>
               <a:t>TOPIC CONVERSATION — Stretch. Examiner asks the questions in order and may add “لِمَاذَا؟ / هَلْ يُمْكِنُ أَنْ تَشْرَحَ أَكْثَرَ؟” to push for more. Candidate aims for a developed answer: opinion, balance, concession and a conditional.
 </a:t>
             </a:r>
@@ -1510,7 +1530,11 @@
           <a:lstStyle/>
           <a:p>
             <a:r>
-              <a:rPr lang="en-US" dirty="0"/>
+              <a:rPr lang="ar-SA" dirty="0">
+                <a:latin typeface="Amiri" pitchFamily="2" charset="-78"/>
+                <a:ea typeface="Amiri" pitchFamily="2" charset="-78"/>
+                <a:cs typeface="Amiri" pitchFamily="2" charset="-78"/>
+              </a:rPr>
               <a:t>WELCOME (1 min) — while students join.
 • Greet each student by name as they arrive: السَّلَامُ عَلَيْكُمْ. Take the register (Pastoral Tracker: attendance 0/1).
 • 2-MINUTE CHECK-IN (SEND training): a private chat to any student who seemed unsettled last lesson — “Are you okay today? 👍 / 👎”.
@@ -2224,7 +2248,11 @@
           <a:lstStyle/>
           <a:p>
             <a:r>
-              <a:rPr lang="en-US" dirty="0"/>
+              <a:rPr lang="ar-SA" dirty="0">
+                <a:latin typeface="Amiri" pitchFamily="2" charset="-78"/>
+                <a:ea typeface="Amiri" pitchFamily="2" charset="-78"/>
+                <a:cs typeface="Amiri" pitchFamily="2" charset="-78"/>
+              </a:rPr>
               <a:t>TEACH (3 min). Role play = precise and complete; conversation = develop. Choral repetition of the repair phrases. To a girl: تُعِيدِي.</a:t>
             </a:r>
             <a:endParaRPr lang="en-US" dirty="0"/>
@@ -2312,7 +2340,11 @@
           <a:lstStyle/>
           <a:p>
             <a:r>
-              <a:rPr lang="en-US" dirty="0"/>
+              <a:rPr lang="ar-SA" dirty="0">
+                <a:latin typeface="Amiri" pitchFamily="2" charset="-78"/>
+                <a:ea typeface="Amiri" pitchFamily="2" charset="-78"/>
+                <a:cs typeface="Amiri" pitchFamily="2" charset="-78"/>
+              </a:rPr>
               <a:t>LANGUAGE BANK (2 min) — real: إِذَا + past, then فَسَوْفَ / فَسَأَ… (إِذَا سَافَرْتُ، فَسَأَتَطَوَّعُ). Formal real: إِنْ + jussive ×2 (إِنْ تَدْرُسْ تَنْجَحْ). Unreal: لَوْ + past, la- + past (لَوْ كُنْتُ رَئِيسَةً لَمَنَعْتُ …). One of each in a Stretch answer.</a:t>
             </a:r>
             <a:endParaRPr lang="en-US" dirty="0"/>
@@ -2400,7 +2432,11 @@
           <a:lstStyle/>
           <a:p>
             <a:r>
-              <a:rPr lang="en-US" dirty="0"/>
+              <a:rPr lang="ar-SA" dirty="0">
+                <a:latin typeface="Amiri" pitchFamily="2" charset="-78"/>
+                <a:ea typeface="Amiri" pitchFamily="2" charset="-78"/>
+                <a:cs typeface="Amiri" pitchFamily="2" charset="-78"/>
+              </a:rPr>
               <a:t>LANGUAGE BANK (2 min) — passive for global facts: صُنِعَ هَاتِفِي فِي الصِّينِ · تُنَاقَشُ القَضَايَا فِي الأُمَمِ المُتَّحِدَةِ. Balance: مِنْ نَاحِيَةٍ … وَمِنْ نَاحِيَةٍ أُخْرَى … ؛ صَحِيحٌ أَنَّ … غَيْرَ أَنَّ …</a:t>
             </a:r>
             <a:endParaRPr lang="en-US" dirty="0"/>
@@ -2576,7 +2612,11 @@
           <a:lstStyle/>
           <a:p>
             <a:r>
-              <a:rPr lang="en-US" dirty="0"/>
+              <a:rPr lang="ar-SA" dirty="0">
+                <a:latin typeface="Amiri" pitchFamily="2" charset="-78"/>
+                <a:ea typeface="Amiri" pitchFamily="2" charset="-78"/>
+                <a:cs typeface="Amiri" pitchFamily="2" charset="-78"/>
+              </a:rPr>
               <a:t>ROLE PLAY A (Core) — the Model UN club.
 SET-UP IN THE BREAKOUT ROOM: A = examiner (reads the left column ONLY — the questions, in order), B = candidate (sees the task column; Core may use the help column), C = observer (ticks the feedback checklist). 1 minute preparation, about 3 minutes speaking, 1 minute feedback, then rotate.
 Task ! is the unexpected question: in the exam the candidate has not seen it — the examiner should read it without warning.
@@ -2668,7 +2708,11 @@
           <a:lstStyle/>
           <a:p>
             <a:r>
-              <a:rPr lang="en-US" dirty="0"/>
+              <a:rPr lang="ar-SA" dirty="0">
+                <a:latin typeface="Amiri" pitchFamily="2" charset="-78"/>
+                <a:ea typeface="Amiri" pitchFamily="2" charset="-78"/>
+                <a:cs typeface="Amiri" pitchFamily="2" charset="-78"/>
+              </a:rPr>
               <a:t>ROLE PLAY B (Core+) — in a shopping centre.
 SET-UP IN THE BREAKOUT ROOM: A = examiner (reads the left column ONLY — the questions, in order), B = candidate (sees the task column; Core may use the help column), C = observer (ticks the feedback checklist). 1 minute preparation, about 3 minutes speaking, 1 minute feedback, then rotate.
 Task ! is the unexpected question: in the exam the candidate has not seen it — the examiner should read it without warning.
@@ -3156,6 +3200,7 @@
                   <a:srgbClr val="D4AF37"/>
                 </a:solidFill>
                 <a:latin typeface="Amiri" pitchFamily="2" charset="-78"/>
+                <a:ea typeface="Amiri" pitchFamily="2" charset="-78"/>
                 <a:cs typeface="Amiri" pitchFamily="2" charset="-78"/>
               </a:rPr>
               <a:t>م</a:t>
@@ -3362,6 +3407,7 @@
                   <a:srgbClr val="D4AF37"/>
                 </a:solidFill>
                 <a:latin typeface="Amiri" pitchFamily="2" charset="-78"/>
+                <a:ea typeface="Amiri" pitchFamily="2" charset="-78"/>
                 <a:cs typeface="Amiri" pitchFamily="2" charset="-78"/>
               </a:rPr>
               <a:t>وَرْشَةُ التَّحَدُّثِ — الحَيَاةُ الدُّوَلِيَّةُ وَالرَّوَابِطُ العَالَمِيَّةُ</a:t>
@@ -3413,6 +3459,7 @@
                   <a:srgbClr val="C6D2E6"/>
                 </a:solidFill>
                 <a:latin typeface="Amiri" pitchFamily="2" charset="-78"/>
+                <a:ea typeface="Amiri" pitchFamily="2" charset="-78"/>
                 <a:cs typeface="Amiri" pitchFamily="2" charset="-78"/>
               </a:rPr>
               <a:t>إِذَا … فَسَأُسَافِرُ</a:t>
@@ -3439,6 +3486,7 @@
                   <a:srgbClr val="C6D2E6"/>
                 </a:solidFill>
                 <a:latin typeface="Amiri" pitchFamily="2" charset="-78"/>
+                <a:ea typeface="Amiri" pitchFamily="2" charset="-78"/>
                 <a:cs typeface="Amiri" pitchFamily="2" charset="-78"/>
               </a:rPr>
               <a:t>لَوْ … لَسَافَرْتُ</a:t>
@@ -3465,6 +3513,7 @@
                   <a:srgbClr val="C6D2E6"/>
                 </a:solidFill>
                 <a:latin typeface="Amiri" pitchFamily="2" charset="-78"/>
+                <a:ea typeface="Amiri" pitchFamily="2" charset="-78"/>
                 <a:cs typeface="Amiri" pitchFamily="2" charset="-78"/>
               </a:rPr>
               <a:t>صُنِعَ فِي</a:t>
@@ -3491,6 +3540,7 @@
                   <a:srgbClr val="C6D2E6"/>
                 </a:solidFill>
                 <a:latin typeface="Amiri" pitchFamily="2" charset="-78"/>
+                <a:ea typeface="Amiri" pitchFamily="2" charset="-78"/>
                 <a:cs typeface="Amiri" pitchFamily="2" charset="-78"/>
               </a:rPr>
               <a:t>تُنَاقَشُ</a:t>
@@ -3923,6 +3973,7 @@
                   <a:srgbClr val="D4AF37"/>
                 </a:solidFill>
                 <a:latin typeface="Amiri" pitchFamily="2" charset="-78"/>
+                <a:ea typeface="Amiri" pitchFamily="2" charset="-78"/>
                 <a:cs typeface="Amiri" pitchFamily="2" charset="-78"/>
               </a:rPr>
               <a:t>م</a:t>
@@ -4243,6 +4294,7 @@
                   <a:srgbClr val="8A6D1E"/>
                 </a:solidFill>
                 <a:latin typeface="Amiri" pitchFamily="2" charset="-78"/>
+                <a:ea typeface="Amiri" pitchFamily="2" charset="-78"/>
                 <a:cs typeface="Amiri" pitchFamily="2" charset="-78"/>
               </a:rPr>
               <a:t>سَنَةٌ فَاصِلَةٌ فِي الخَارِجِ؟</a:t>
@@ -4523,6 +4575,7 @@
                   <a:srgbClr val="1B3B6F"/>
                 </a:solidFill>
                 <a:latin typeface="Amiri" pitchFamily="2" charset="-78"/>
+                <a:ea typeface="Amiri" pitchFamily="2" charset="-78"/>
                 <a:cs typeface="Amiri" pitchFamily="2" charset="-78"/>
               </a:rPr>
               <a:t>أُرِيدُ أَنْ … لِكَيْ …</a:t>
@@ -4599,6 +4652,7 @@
                   <a:srgbClr val="1B3B6F"/>
                 </a:solidFill>
                 <a:latin typeface="Amiri" pitchFamily="2" charset="-78"/>
+                <a:ea typeface="Amiri" pitchFamily="2" charset="-78"/>
                 <a:cs typeface="Amiri" pitchFamily="2" charset="-78"/>
               </a:rPr>
               <a:t>سَمِعْتُ أَنَّكَ تُفَكِّرُ فِي سَنَةٍ فِي الخَارِجِ. لِمَاذَا؟</a:t>
@@ -4702,6 +4756,7 @@
                   <a:srgbClr val="1B3B6F"/>
                 </a:solidFill>
                 <a:latin typeface="Amiri" pitchFamily="2" charset="-78"/>
+                <a:ea typeface="Amiri" pitchFamily="2" charset="-78"/>
                 <a:cs typeface="Amiri" pitchFamily="2" charset="-78"/>
               </a:rPr>
               <a:t>يُنَظَّمُ مِنْ قِبَلِ … وَيُمَوَّلُ …</a:t>
@@ -4778,6 +4833,7 @@
                   <a:srgbClr val="1B3B6F"/>
                 </a:solidFill>
                 <a:latin typeface="Amiri" pitchFamily="2" charset="-78"/>
+                <a:ea typeface="Amiri" pitchFamily="2" charset="-78"/>
                 <a:cs typeface="Amiri" pitchFamily="2" charset="-78"/>
               </a:rPr>
               <a:t>وَمَنْ يُنَظِّمُ هٰذَا البَرْنَامَجَ؟</a:t>
@@ -4881,6 +4937,7 @@
                   <a:srgbClr val="1B3B6F"/>
                 </a:solidFill>
                 <a:latin typeface="Amiri" pitchFamily="2" charset="-78"/>
+                <a:ea typeface="Amiri" pitchFamily="2" charset="-78"/>
                 <a:cs typeface="Amiri" pitchFamily="2" charset="-78"/>
               </a:rPr>
               <a:t>إِذَا أَجَّلْتُ … فَسَأَبْدَأُ …</a:t>
@@ -4957,6 +5014,7 @@
                   <a:srgbClr val="1B3B6F"/>
                 </a:solidFill>
                 <a:latin typeface="Amiri" pitchFamily="2" charset="-78"/>
+                <a:ea typeface="Amiri" pitchFamily="2" charset="-78"/>
                 <a:cs typeface="Amiri" pitchFamily="2" charset="-78"/>
               </a:rPr>
               <a:t>وَمَاذَا عَنِ الجَامِعَةِ؟</a:t>
@@ -5060,6 +5118,7 @@
                   <a:srgbClr val="1B3B6F"/>
                 </a:solidFill>
                 <a:latin typeface="Amiri" pitchFamily="2" charset="-78"/>
+                <a:ea typeface="Amiri" pitchFamily="2" charset="-78"/>
                 <a:cs typeface="Amiri" pitchFamily="2" charset="-78"/>
               </a:rPr>
               <a:t>مِنْ نَاحِيَةٍ … وَمِنْ نَاحِيَةٍ أُخْرَى …</a:t>
@@ -5136,6 +5195,7 @@
                   <a:srgbClr val="1B3B6F"/>
                 </a:solidFill>
                 <a:latin typeface="Amiri" pitchFamily="2" charset="-78"/>
+                <a:ea typeface="Amiri" pitchFamily="2" charset="-78"/>
                 <a:cs typeface="Amiri" pitchFamily="2" charset="-78"/>
               </a:rPr>
               <a:t>أَنَا قَلِقَةٌ عَلَيْكَ.</a:t>
@@ -5239,6 +5299,7 @@
                   <a:srgbClr val="1B3B6F"/>
                 </a:solidFill>
                 <a:latin typeface="Amiri" pitchFamily="2" charset="-78"/>
+                <a:ea typeface="Amiri" pitchFamily="2" charset="-78"/>
                 <a:cs typeface="Amiri" pitchFamily="2" charset="-78"/>
               </a:rPr>
               <a:t>لَوْ لَمْ يُعْجِبْنِي، لَعُدْتُ …</a:t>
@@ -5315,6 +5376,7 @@
                   <a:srgbClr val="1B3B6F"/>
                 </a:solidFill>
                 <a:latin typeface="Amiri" pitchFamily="2" charset="-78"/>
+                <a:ea typeface="Amiri" pitchFamily="2" charset="-78"/>
                 <a:cs typeface="Amiri" pitchFamily="2" charset="-78"/>
               </a:rPr>
               <a:t>وَلَوْ لَمْ يُعْجِبْكَ الأَمْرُ هُنَاكَ؟</a:t>
@@ -5524,6 +5586,7 @@
                   <a:srgbClr val="D4AF37"/>
                 </a:solidFill>
                 <a:latin typeface="Amiri" pitchFamily="2" charset="-78"/>
+                <a:ea typeface="Amiri" pitchFamily="2" charset="-78"/>
                 <a:cs typeface="Amiri" pitchFamily="2" charset="-78"/>
               </a:rPr>
               <a:t>م</a:t>
@@ -5844,6 +5907,7 @@
                   <a:srgbClr val="8A6D1E"/>
                 </a:solidFill>
                 <a:latin typeface="Amiri" pitchFamily="2" charset="-78"/>
+                <a:ea typeface="Amiri" pitchFamily="2" charset="-78"/>
                 <a:cs typeface="Amiri" pitchFamily="2" charset="-78"/>
               </a:rPr>
               <a:t>العَوْلَمَةُ: مَنِ الرَّابِحُ؟</a:t>
@@ -6124,6 +6188,7 @@
                   <a:srgbClr val="1B3B6F"/>
                 </a:solidFill>
                 <a:latin typeface="Amiri" pitchFamily="2" charset="-78"/>
+                <a:ea typeface="Amiri" pitchFamily="2" charset="-78"/>
                 <a:cs typeface="Amiri" pitchFamily="2" charset="-78"/>
               </a:rPr>
               <a:t>مِنْ نَاحِيَةٍ … وَمِنْ نَاحِيَةٍ أُخْرَى …</a:t>
@@ -6200,6 +6265,7 @@
                   <a:srgbClr val="1B3B6F"/>
                 </a:solidFill>
                 <a:latin typeface="Amiri" pitchFamily="2" charset="-78"/>
+                <a:ea typeface="Amiri" pitchFamily="2" charset="-78"/>
                 <a:cs typeface="Amiri" pitchFamily="2" charset="-78"/>
               </a:rPr>
               <a:t>هَلْ جَعَلَتِ العَوْلَمَةُ العَالَمَ أَفْضَلَ؟</a:t>
@@ -6303,6 +6369,7 @@
                   <a:srgbClr val="1B3B6F"/>
                 </a:solidFill>
                 <a:latin typeface="Amiri" pitchFamily="2" charset="-78"/>
+                <a:ea typeface="Amiri" pitchFamily="2" charset="-78"/>
                 <a:cs typeface="Amiri" pitchFamily="2" charset="-78"/>
               </a:rPr>
               <a:t>مَثَلًا، … صُنِعَ … وَ… زُرِعَ …</a:t>
@@ -6379,6 +6446,7 @@
                   <a:srgbClr val="1B3B6F"/>
                 </a:solidFill>
                 <a:latin typeface="Amiri" pitchFamily="2" charset="-78"/>
+                <a:ea typeface="Amiri" pitchFamily="2" charset="-78"/>
                 <a:cs typeface="Amiri" pitchFamily="2" charset="-78"/>
               </a:rPr>
               <a:t>أَعْطِنَا مِثَالًا مِنْ حَيَاتِكَ اليَوْمِيَّةِ.</a:t>
@@ -6482,6 +6550,7 @@
                   <a:srgbClr val="1B3B6F"/>
                 </a:solidFill>
                 <a:latin typeface="Amiri" pitchFamily="2" charset="-78"/>
+                <a:ea typeface="Amiri" pitchFamily="2" charset="-78"/>
                 <a:cs typeface="Amiri" pitchFamily="2" charset="-78"/>
               </a:rPr>
               <a:t>صَحِيحٌ أَنَّ … غَيْرَ أَنَّ … إِذَا …</a:t>
@@ -6558,6 +6627,7 @@
                   <a:srgbClr val="1B3B6F"/>
                 </a:solidFill>
                 <a:latin typeface="Amiri" pitchFamily="2" charset="-78"/>
+                <a:ea typeface="Amiri" pitchFamily="2" charset="-78"/>
                 <a:cs typeface="Amiri" pitchFamily="2" charset="-78"/>
               </a:rPr>
               <a:t>لٰكِنَّ الدُّوَلَ الفَقِيرَةَ تَخْسَرُ دَائِمًا.</a:t>
@@ -6661,6 +6731,7 @@
                   <a:srgbClr val="1B3B6F"/>
                 </a:solidFill>
                 <a:latin typeface="Amiri" pitchFamily="2" charset="-78"/>
+                <a:ea typeface="Amiri" pitchFamily="2" charset="-78"/>
                 <a:cs typeface="Amiri" pitchFamily="2" charset="-78"/>
               </a:rPr>
               <a:t>يَنْبَغِي أَنْ يَشْتَرُوا … ؛ لِأَنَّ …</a:t>
@@ -6737,6 +6808,7 @@
                   <a:srgbClr val="1B3B6F"/>
                 </a:solidFill>
                 <a:latin typeface="Amiri" pitchFamily="2" charset="-78"/>
+                <a:ea typeface="Amiri" pitchFamily="2" charset="-78"/>
                 <a:cs typeface="Amiri" pitchFamily="2" charset="-78"/>
               </a:rPr>
               <a:t>وَمَا دَوْرُ الشَّبَابِ؟</a:t>
@@ -6840,6 +6912,7 @@
                   <a:srgbClr val="1B3B6F"/>
                 </a:solidFill>
                 <a:latin typeface="Amiri" pitchFamily="2" charset="-78"/>
+                <a:ea typeface="Amiri" pitchFamily="2" charset="-78"/>
                 <a:cs typeface="Amiri" pitchFamily="2" charset="-78"/>
               </a:rPr>
               <a:t>لَوْ كُنْتُ …، لَدَعَوْتُ …</a:t>
@@ -6919,6 +6992,7 @@
                   <a:srgbClr val="1B3B6F"/>
                 </a:solidFill>
                 <a:latin typeface="Amiri" pitchFamily="2" charset="-78"/>
+                <a:ea typeface="Amiri" pitchFamily="2" charset="-78"/>
                 <a:cs typeface="Amiri" pitchFamily="2" charset="-78"/>
               </a:rPr>
               <a:t>لَوْ كُنْتَ أَمِينًا عَامًّا لِلْأُمَمِ المُتَّحِدَةِ لِيَوْمٍ وَاحِدٍ، مَاذَا تَفْعَلُ؟</a:t>
@@ -7128,6 +7202,7 @@
                   <a:srgbClr val="D4AF37"/>
                 </a:solidFill>
                 <a:latin typeface="Amiri" pitchFamily="2" charset="-78"/>
+                <a:ea typeface="Amiri" pitchFamily="2" charset="-78"/>
                 <a:cs typeface="Amiri" pitchFamily="2" charset="-78"/>
               </a:rPr>
               <a:t>م</a:t>
@@ -7448,6 +7523,7 @@
                   <a:srgbClr val="8A6D1E"/>
                 </a:solidFill>
                 <a:latin typeface="Amiri" pitchFamily="2" charset="-78"/>
+                <a:ea typeface="Amiri" pitchFamily="2" charset="-78"/>
                 <a:cs typeface="Amiri" pitchFamily="2" charset="-78"/>
               </a:rPr>
               <a:t>وَرَقَةُ المُلَاحِظِ</a:t>
@@ -8918,6 +8994,7 @@
                   <a:srgbClr val="D4AF37"/>
                 </a:solidFill>
                 <a:latin typeface="Amiri" pitchFamily="2" charset="-78"/>
+                <a:ea typeface="Amiri" pitchFamily="2" charset="-78"/>
                 <a:cs typeface="Amiri" pitchFamily="2" charset="-78"/>
               </a:rPr>
               <a:t>م</a:t>
@@ -9238,6 +9315,7 @@
                   <a:srgbClr val="8A6D1E"/>
                 </a:solidFill>
                 <a:latin typeface="Amiri" pitchFamily="2" charset="-78"/>
+                <a:ea typeface="Amiri" pitchFamily="2" charset="-78"/>
                 <a:cs typeface="Amiri" pitchFamily="2" charset="-78"/>
               </a:rPr>
               <a:t>نَمُوذَجُ الإِجَابَةِ</a:t>
@@ -9480,6 +9558,7 @@
                   <a:srgbClr val="1B3B6F"/>
                 </a:solidFill>
                 <a:latin typeface="Amiri" pitchFamily="2" charset="-78"/>
+                <a:ea typeface="Amiri" pitchFamily="2" charset="-78"/>
                 <a:cs typeface="Amiri" pitchFamily="2" charset="-78"/>
               </a:rPr>
               <a:t>لِأَنِّي أُحِبُّ السِّيَاسَةَ وَالقَضَايَا العَالَمِيَّةَ.</a:t>
@@ -9556,6 +9635,7 @@
                   <a:srgbClr val="1B3B6F"/>
                 </a:solidFill>
                 <a:latin typeface="Amiri" pitchFamily="2" charset="-78"/>
+                <a:ea typeface="Amiri" pitchFamily="2" charset="-78"/>
                 <a:cs typeface="Amiri" pitchFamily="2" charset="-78"/>
               </a:rPr>
               <a:t>أَهْلًا! لِمَاذَا تُرِيدُ أَنْ تَنْضَمَّ إِلَى النَّادِي؟</a:t>
@@ -9659,6 +9739,7 @@
                   <a:srgbClr val="1B3B6F"/>
                 </a:solidFill>
                 <a:latin typeface="Amiri" pitchFamily="2" charset="-78"/>
+                <a:ea typeface="Amiri" pitchFamily="2" charset="-78"/>
                 <a:cs typeface="Amiri" pitchFamily="2" charset="-78"/>
               </a:rPr>
               <a:t>أَتَكَلَّمُ الإِنْجْلِيزِيَّةَ وَالعَرَبِيَّةَ وَقَلِيلًا مِنَ الفَرَنْسِيَّةِ.</a:t>
@@ -9735,6 +9816,7 @@
                   <a:srgbClr val="1B3B6F"/>
                 </a:solidFill>
                 <a:latin typeface="Amiri" pitchFamily="2" charset="-78"/>
+                <a:ea typeface="Amiri" pitchFamily="2" charset="-78"/>
                 <a:cs typeface="Amiri" pitchFamily="2" charset="-78"/>
               </a:rPr>
               <a:t>مَا اللُّغَاتُ الَّتِي تَتَكَلَّمُهَا؟</a:t>
@@ -9838,6 +9920,7 @@
                   <a:srgbClr val="1B3B6F"/>
                 </a:solidFill>
                 <a:latin typeface="Amiri" pitchFamily="2" charset="-78"/>
+                <a:ea typeface="Amiri" pitchFamily="2" charset="-78"/>
                 <a:cs typeface="Amiri" pitchFamily="2" charset="-78"/>
               </a:rPr>
               <a:t>أُرِيدُ أَنْ أُمَثِّلَ المَغْرِبَ.</a:t>
@@ -9914,6 +9997,7 @@
                   <a:srgbClr val="1B3B6F"/>
                 </a:solidFill>
                 <a:latin typeface="Amiri" pitchFamily="2" charset="-78"/>
+                <a:ea typeface="Amiri" pitchFamily="2" charset="-78"/>
                 <a:cs typeface="Amiri" pitchFamily="2" charset="-78"/>
               </a:rPr>
               <a:t>أَيَّ بَلَدٍ تُرِيدُ أَنْ تُمَثِّلَ؟</a:t>
@@ -10017,6 +10101,7 @@
                   <a:srgbClr val="1B3B6F"/>
                 </a:solidFill>
                 <a:latin typeface="Amiri" pitchFamily="2" charset="-78"/>
+                <a:ea typeface="Amiri" pitchFamily="2" charset="-78"/>
                 <a:cs typeface="Amiri" pitchFamily="2" charset="-78"/>
               </a:rPr>
               <a:t>أَيْنَ سَيَكُونُ المُؤْتَمَرُ؟</a:t>
@@ -10093,6 +10178,7 @@
                   <a:srgbClr val="1B3B6F"/>
                 </a:solidFill>
                 <a:latin typeface="Amiri" pitchFamily="2" charset="-78"/>
+                <a:ea typeface="Amiri" pitchFamily="2" charset="-78"/>
                 <a:cs typeface="Amiri" pitchFamily="2" charset="-78"/>
               </a:rPr>
               <a:t>جَيِّدٌ. المُؤْتَمَرُ فِي مَارِسَ.</a:t>
@@ -10196,6 +10282,7 @@
                   <a:srgbClr val="1B3B6F"/>
                 </a:solidFill>
                 <a:latin typeface="Amiri" pitchFamily="2" charset="-78"/>
+                <a:ea typeface="Amiri" pitchFamily="2" charset="-78"/>
                 <a:cs typeface="Amiri" pitchFamily="2" charset="-78"/>
               </a:rPr>
               <a:t>أَهَمُّ قَضِيَّةٍ تَغَيُّرُ المُنَاخِ، لِأَنَّهُ يُؤَثِّرُ عَلَى الجَمِيعِ.</a:t>
@@ -10272,6 +10359,7 @@
                   <a:srgbClr val="1B3B6F"/>
                 </a:solidFill>
                 <a:latin typeface="Amiri" pitchFamily="2" charset="-78"/>
+                <a:ea typeface="Amiri" pitchFamily="2" charset="-78"/>
                 <a:cs typeface="Amiri" pitchFamily="2" charset="-78"/>
               </a:rPr>
               <a:t>فِي لَنْدَنَ. مَا القَضِيَّةُ العَالَمِيَّةُ الأَهَمُّ فِي رَأْيِكَ؟</a:t>
@@ -10481,6 +10569,7 @@
                   <a:srgbClr val="D4AF37"/>
                 </a:solidFill>
                 <a:latin typeface="Amiri" pitchFamily="2" charset="-78"/>
+                <a:ea typeface="Amiri" pitchFamily="2" charset="-78"/>
                 <a:cs typeface="Amiri" pitchFamily="2" charset="-78"/>
               </a:rPr>
               <a:t>م</a:t>
@@ -10801,6 +10890,7 @@
                   <a:srgbClr val="8A6D1E"/>
                 </a:solidFill>
                 <a:latin typeface="Amiri" pitchFamily="2" charset="-78"/>
+                <a:ea typeface="Amiri" pitchFamily="2" charset="-78"/>
                 <a:cs typeface="Amiri" pitchFamily="2" charset="-78"/>
               </a:rPr>
               <a:t>نَمُوذَجُ الإِجَابَةِ</a:t>
@@ -11043,6 +11133,7 @@
                   <a:srgbClr val="1B3B6F"/>
                 </a:solidFill>
                 <a:latin typeface="Amiri" pitchFamily="2" charset="-78"/>
+                <a:ea typeface="Amiri" pitchFamily="2" charset="-78"/>
                 <a:cs typeface="Amiri" pitchFamily="2" charset="-78"/>
               </a:rPr>
               <a:t>صُنِعَ فِي الصِّينِ، لٰكِنَّ الشَّرِكَةَ أَمْرِيكِيَّةٌ.</a:t>
@@ -11119,6 +11210,7 @@
                   <a:srgbClr val="1B3B6F"/>
                 </a:solidFill>
                 <a:latin typeface="Amiri" pitchFamily="2" charset="-78"/>
+                <a:ea typeface="Amiri" pitchFamily="2" charset="-78"/>
                 <a:cs typeface="Amiri" pitchFamily="2" charset="-78"/>
               </a:rPr>
               <a:t>هَاتِفُكَ جَدِيدٌ! أَيْنَ صُنِعَ؟</a:t>
@@ -11222,6 +11314,7 @@
                   <a:srgbClr val="1B3B6F"/>
                 </a:solidFill>
                 <a:latin typeface="Amiri" pitchFamily="2" charset="-78"/>
+                <a:ea typeface="Amiri" pitchFamily="2" charset="-78"/>
                 <a:cs typeface="Amiri" pitchFamily="2" charset="-78"/>
               </a:rPr>
               <a:t>صُنِعَ فِي بَنْغْلَادِيشَ مِنَ القُطْنِ.</a:t>
@@ -11298,6 +11391,7 @@
                   <a:srgbClr val="1B3B6F"/>
                 </a:solidFill>
                 <a:latin typeface="Amiri" pitchFamily="2" charset="-78"/>
+                <a:ea typeface="Amiri" pitchFamily="2" charset="-78"/>
                 <a:cs typeface="Amiri" pitchFamily="2" charset="-78"/>
               </a:rPr>
               <a:t>وَهٰذَا القَمِيصُ؟</a:t>
@@ -11401,6 +11495,7 @@
                   <a:srgbClr val="1B3B6F"/>
                 </a:solidFill>
                 <a:latin typeface="Amiri" pitchFamily="2" charset="-78"/>
+                <a:ea typeface="Amiri" pitchFamily="2" charset="-78"/>
                 <a:cs typeface="Amiri" pitchFamily="2" charset="-78"/>
               </a:rPr>
               <a:t>نَعَمْ، لِأَنَّ العُمَّالَ أَحْيَانًا يَعْمَلُونَ سَاعَاتٍ طَوِيلَةً بِرَوَاتِبَ قَلِيلَةٍ.</a:t>
@@ -11477,6 +11572,7 @@
                   <a:srgbClr val="1B3B6F"/>
                 </a:solidFill>
                 <a:latin typeface="Amiri" pitchFamily="2" charset="-78"/>
+                <a:ea typeface="Amiri" pitchFamily="2" charset="-78"/>
                 <a:cs typeface="Amiri" pitchFamily="2" charset="-78"/>
               </a:rPr>
               <a:t>هَلْ يُهِمُّكَ أَيْنَ تُصْنَعُ مَلَابِسُكَ؟</a:t>
@@ -11580,6 +11676,7 @@
                   <a:srgbClr val="1B3B6F"/>
                 </a:solidFill>
                 <a:latin typeface="Amiri" pitchFamily="2" charset="-78"/>
+                <a:ea typeface="Amiri" pitchFamily="2" charset="-78"/>
                 <a:cs typeface="Amiri" pitchFamily="2" charset="-78"/>
               </a:rPr>
               <a:t>إِذَا اشْتَرَيْنَا أَقَلَّ وَاخْتَرْنَا شَرِكَاتٍ عَادِلَةً، فَسَنُسَاعِدُ العُمَّالَ. مَا رَأْيُكَ؟</a:t>
@@ -11656,6 +11753,7 @@
                   <a:srgbClr val="1B3B6F"/>
                 </a:solidFill>
                 <a:latin typeface="Amiri" pitchFamily="2" charset="-78"/>
+                <a:ea typeface="Amiri" pitchFamily="2" charset="-78"/>
                 <a:cs typeface="Amiri" pitchFamily="2" charset="-78"/>
               </a:rPr>
               <a:t>إِذَنْ مَاذَا نَفْعَلُ؟</a:t>
@@ -11759,6 +11857,7 @@
                   <a:srgbClr val="1B3B6F"/>
                 </a:solidFill>
                 <a:latin typeface="Amiri" pitchFamily="2" charset="-78"/>
+                <a:ea typeface="Amiri" pitchFamily="2" charset="-78"/>
                 <a:cs typeface="Amiri" pitchFamily="2" charset="-78"/>
               </a:rPr>
               <a:t>نَعَمْ، أَشْتَرِي مِنْ مَحَلَّاتِ الجَمْعِيَّاتِ الخَيْرِيَّةِ، لِأَنَّهَا أَرْخَصُ وَأَفْضَلُ لِلْبِيئَةِ.</a:t>
@@ -11835,6 +11934,7 @@
                   <a:srgbClr val="1B3B6F"/>
                 </a:solidFill>
                 <a:latin typeface="Amiri" pitchFamily="2" charset="-78"/>
+                <a:ea typeface="Amiri" pitchFamily="2" charset="-78"/>
                 <a:cs typeface="Amiri" pitchFamily="2" charset="-78"/>
               </a:rPr>
               <a:t>فِكْرَةٌ جَيِّدَةٌ. هَلْ تَشْتَرِي مَلَابِسَ مُسْتَعْمَلَةً؟</a:t>
@@ -12044,6 +12144,7 @@
                   <a:srgbClr val="D4AF37"/>
                 </a:solidFill>
                 <a:latin typeface="Amiri" pitchFamily="2" charset="-78"/>
+                <a:ea typeface="Amiri" pitchFamily="2" charset="-78"/>
                 <a:cs typeface="Amiri" pitchFamily="2" charset="-78"/>
               </a:rPr>
               <a:t>م</a:t>
@@ -12364,6 +12465,7 @@
                   <a:srgbClr val="8A6D1E"/>
                 </a:solidFill>
                 <a:latin typeface="Amiri" pitchFamily="2" charset="-78"/>
+                <a:ea typeface="Amiri" pitchFamily="2" charset="-78"/>
                 <a:cs typeface="Amiri" pitchFamily="2" charset="-78"/>
               </a:rPr>
               <a:t>نَمُوذَجُ الإِجَابَةِ</a:t>
@@ -12606,6 +12708,7 @@
                   <a:srgbClr val="1B3B6F"/>
                 </a:solidFill>
                 <a:latin typeface="Amiri" pitchFamily="2" charset="-78"/>
+                <a:ea typeface="Amiri" pitchFamily="2" charset="-78"/>
                 <a:cs typeface="Amiri" pitchFamily="2" charset="-78"/>
               </a:rPr>
               <a:t>أُرِيدُ أَنْ أَتَطَوَّعَ فِي مَدْرَسَةٍ فِي الأُرْدُنِّ، لِكَيْ أُحَسِّنَ لُغَتِي وَأُسَاعِدَ الأَطْفَالَ اللَّاجِئِينَ.</a:t>
@@ -12682,6 +12785,7 @@
                   <a:srgbClr val="1B3B6F"/>
                 </a:solidFill>
                 <a:latin typeface="Amiri" pitchFamily="2" charset="-78"/>
+                <a:ea typeface="Amiri" pitchFamily="2" charset="-78"/>
                 <a:cs typeface="Amiri" pitchFamily="2" charset="-78"/>
               </a:rPr>
               <a:t>سَمِعْتُ أَنَّكَ تُفَكِّرُ فِي سَنَةٍ فِي الخَارِجِ. لِمَاذَا؟</a:t>
@@ -12785,6 +12889,7 @@
                   <a:srgbClr val="1B3B6F"/>
                 </a:solidFill>
                 <a:latin typeface="Amiri" pitchFamily="2" charset="-78"/>
+                <a:ea typeface="Amiri" pitchFamily="2" charset="-78"/>
                 <a:cs typeface="Amiri" pitchFamily="2" charset="-78"/>
               </a:rPr>
               <a:t>يُنَظَّمُ مِنْ قِبَلِ مُنَظَّمَةٍ دُوَلِيَّةٍ مَعْرُوفَةٍ، وَيُمَوَّلُ جُزْءٌ مِنْهُ مِنَ الجَامِعَةِ.</a:t>
@@ -12861,6 +12966,7 @@
                   <a:srgbClr val="1B3B6F"/>
                 </a:solidFill>
                 <a:latin typeface="Amiri" pitchFamily="2" charset="-78"/>
+                <a:ea typeface="Amiri" pitchFamily="2" charset="-78"/>
                 <a:cs typeface="Amiri" pitchFamily="2" charset="-78"/>
               </a:rPr>
               <a:t>وَمَنْ يُنَظِّمُ هٰذَا البَرْنَامَجَ؟</a:t>
@@ -12964,6 +13070,7 @@
                   <a:srgbClr val="1B3B6F"/>
                 </a:solidFill>
                 <a:latin typeface="Amiri" pitchFamily="2" charset="-78"/>
+                <a:ea typeface="Amiri" pitchFamily="2" charset="-78"/>
                 <a:cs typeface="Amiri" pitchFamily="2" charset="-78"/>
               </a:rPr>
               <a:t>إِذَا أَجَّلْتُ الجَامِعَةَ سَنَةً، فَسَأَبْدَأُ دِرَاسَتِي بِخِبْرَةٍ أَكْبَرَ، وَسَيَكُونُ مَكَانِي مَحْجُوزًا.</a:t>
@@ -13040,6 +13147,7 @@
                   <a:srgbClr val="1B3B6F"/>
                 </a:solidFill>
                 <a:latin typeface="Amiri" pitchFamily="2" charset="-78"/>
+                <a:ea typeface="Amiri" pitchFamily="2" charset="-78"/>
                 <a:cs typeface="Amiri" pitchFamily="2" charset="-78"/>
               </a:rPr>
               <a:t>وَمَاذَا عَنِ الجَامِعَةِ؟</a:t>
@@ -13143,6 +13251,7 @@
                   <a:srgbClr val="1B3B6F"/>
                 </a:solidFill>
                 <a:latin typeface="Amiri" pitchFamily="2" charset="-78"/>
+                <a:ea typeface="Amiri" pitchFamily="2" charset="-78"/>
                 <a:cs typeface="Amiri" pitchFamily="2" charset="-78"/>
               </a:rPr>
               <a:t>أَفْهَمُ ذٰلِكَ؛ مِنْ نَاحِيَةٍ، سَأَكُونُ بَعِيدًا عَنْكُمْ، وَمِنْ نَاحِيَةٍ أُخْرَى، سَأَسْكُنُ عِنْدَ خَالِي فِي عَمَّانَ، وَسَنَتَكَلَّمُ كُلَّ يَوْمٍ.</a:t>
@@ -13219,6 +13328,7 @@
                   <a:srgbClr val="1B3B6F"/>
                 </a:solidFill>
                 <a:latin typeface="Amiri" pitchFamily="2" charset="-78"/>
+                <a:ea typeface="Amiri" pitchFamily="2" charset="-78"/>
                 <a:cs typeface="Amiri" pitchFamily="2" charset="-78"/>
               </a:rPr>
               <a:t>أَنَا قَلِقَةٌ عَلَيْكَ.</a:t>
@@ -13322,6 +13432,7 @@
                   <a:srgbClr val="1B3B6F"/>
                 </a:solidFill>
                 <a:latin typeface="Amiri" pitchFamily="2" charset="-78"/>
+                <a:ea typeface="Amiri" pitchFamily="2" charset="-78"/>
                 <a:cs typeface="Amiri" pitchFamily="2" charset="-78"/>
               </a:rPr>
               <a:t>لَوْ لَمْ يُعْجِبْنِي، لَعُدْتُ بَعْدَ ثَلَاثَةِ أَشْهُرٍ، وَلَعَمِلْتُ هُنَا حَتَّى تَبْدَأَ الجَامِعَةُ.</a:t>
@@ -13398,6 +13509,7 @@
                   <a:srgbClr val="1B3B6F"/>
                 </a:solidFill>
                 <a:latin typeface="Amiri" pitchFamily="2" charset="-78"/>
+                <a:ea typeface="Amiri" pitchFamily="2" charset="-78"/>
                 <a:cs typeface="Amiri" pitchFamily="2" charset="-78"/>
               </a:rPr>
               <a:t>وَلَوْ لَمْ يُعْجِبْكَ الأَمْرُ هُنَاكَ؟</a:t>
@@ -13607,6 +13719,7 @@
                   <a:srgbClr val="D4AF37"/>
                 </a:solidFill>
                 <a:latin typeface="Amiri" pitchFamily="2" charset="-78"/>
+                <a:ea typeface="Amiri" pitchFamily="2" charset="-78"/>
                 <a:cs typeface="Amiri" pitchFamily="2" charset="-78"/>
               </a:rPr>
               <a:t>م</a:t>
@@ -13927,6 +14040,7 @@
                   <a:srgbClr val="8A6D1E"/>
                 </a:solidFill>
                 <a:latin typeface="Amiri" pitchFamily="2" charset="-78"/>
+                <a:ea typeface="Amiri" pitchFamily="2" charset="-78"/>
                 <a:cs typeface="Amiri" pitchFamily="2" charset="-78"/>
               </a:rPr>
               <a:t>نَمُوذَجُ الإِجَابَةِ</a:t>
@@ -14172,6 +14286,7 @@
                   <a:srgbClr val="1B3B6F"/>
                 </a:solidFill>
                 <a:latin typeface="Amiri" pitchFamily="2" charset="-78"/>
+                <a:ea typeface="Amiri" pitchFamily="2" charset="-78"/>
                 <a:cs typeface="Amiri" pitchFamily="2" charset="-78"/>
               </a:rPr>
               <a:t>مِنْ نَاحِيَةٍ، أَخْرَجَتِ العَوْلَمَةُ مَلَايِينَ النَّاسِ مِنَ الفَقْرِ، وَمِنْ نَاحِيَةٍ أُخْرَى، زَادَتِ الفَجْوَةُ بَيْنَ الأَغْنِيَاءِ وَالفُقَرَاءِ دَاخِلَ الدُّوَلِ نَفْسِهَا.</a:t>
@@ -14248,6 +14363,7 @@
                   <a:srgbClr val="1B3B6F"/>
                 </a:solidFill>
                 <a:latin typeface="Amiri" pitchFamily="2" charset="-78"/>
+                <a:ea typeface="Amiri" pitchFamily="2" charset="-78"/>
                 <a:cs typeface="Amiri" pitchFamily="2" charset="-78"/>
               </a:rPr>
               <a:t>هَلْ جَعَلَتِ العَوْلَمَةُ العَالَمَ أَفْضَلَ؟</a:t>
@@ -14354,6 +14470,7 @@
                   <a:srgbClr val="1B3B6F"/>
                 </a:solidFill>
                 <a:latin typeface="Amiri" pitchFamily="2" charset="-78"/>
+                <a:ea typeface="Amiri" pitchFamily="2" charset="-78"/>
                 <a:cs typeface="Amiri" pitchFamily="2" charset="-78"/>
               </a:rPr>
               <a:t>مَثَلًا، فُطُورِي هٰذَا الصَّبَاحَ: القَهْوَةُ زُرِعَتْ فِي إِثْيُوبْيَا، وَالمَوْزُ قُطِفَ فِي الإِكْوَادُورِ، وَالكُوبُ صُنِعَ فِي الصِّينِ؛ فَأَنَا مُرْتَبِطَةٌ بِثَلَاثِ قَارَّاتٍ قَبْلَ الثَّامِنَةِ!</a:t>
@@ -14430,6 +14547,7 @@
                   <a:srgbClr val="1B3B6F"/>
                 </a:solidFill>
                 <a:latin typeface="Amiri" pitchFamily="2" charset="-78"/>
+                <a:ea typeface="Amiri" pitchFamily="2" charset="-78"/>
                 <a:cs typeface="Amiri" pitchFamily="2" charset="-78"/>
               </a:rPr>
               <a:t>أَعْطِنَا مِثَالًا مِنْ حَيَاتِكَ اليَوْمِيَّةِ.</a:t>
@@ -14533,6 +14651,7 @@
                   <a:srgbClr val="1B3B6F"/>
                 </a:solidFill>
                 <a:latin typeface="Amiri" pitchFamily="2" charset="-78"/>
+                <a:ea typeface="Amiri" pitchFamily="2" charset="-78"/>
                 <a:cs typeface="Amiri" pitchFamily="2" charset="-78"/>
               </a:rPr>
               <a:t>صَحِيحٌ أَنَّ كَثِيرًا مِنْهَا يَخْسَرُ، غَيْرَ أَنَّ ذٰلِكَ لَيْسَ قَدَرًا؛ فَإِذَا فُرِضَتْ قَوَانِينُ عَادِلَةٌ لِلتِّجَارَةِ، فَسَيَسْتَفِيدُ المُزَارِعُونَ أَيْضًا.</a:t>
@@ -14609,6 +14728,7 @@
                   <a:srgbClr val="1B3B6F"/>
                 </a:solidFill>
                 <a:latin typeface="Amiri" pitchFamily="2" charset="-78"/>
+                <a:ea typeface="Amiri" pitchFamily="2" charset="-78"/>
                 <a:cs typeface="Amiri" pitchFamily="2" charset="-78"/>
               </a:rPr>
               <a:t>لٰكِنَّ الدُّوَلَ الفَقِيرَةَ تَخْسَرُ دَائِمًا.</a:t>
@@ -14715,6 +14835,7 @@
                   <a:srgbClr val="1B3B6F"/>
                 </a:solidFill>
                 <a:latin typeface="Amiri" pitchFamily="2" charset="-78"/>
+                <a:ea typeface="Amiri" pitchFamily="2" charset="-78"/>
                 <a:cs typeface="Amiri" pitchFamily="2" charset="-78"/>
               </a:rPr>
               <a:t>يَنْبَغِي أَنْ يَشْتَرُوا بِوَعْيٍ، وَأَنْ يَتَعَلَّمُوا لُغَاتٍ، وَأَنْ يَسْتَخْدِمُوا الإِنْتَرْنِتَ لِلتَّضَامُنِ لَا لِلِاسْتِهْلَاكِ فَقَطْ، لِأَنَّهُمْ مُسْتَهْلِكُو الغَدِ وَصُنَّاعُ قَرَارِهِ.</a:t>
@@ -14791,6 +14912,7 @@
                   <a:srgbClr val="1B3B6F"/>
                 </a:solidFill>
                 <a:latin typeface="Amiri" pitchFamily="2" charset="-78"/>
+                <a:ea typeface="Amiri" pitchFamily="2" charset="-78"/>
                 <a:cs typeface="Amiri" pitchFamily="2" charset="-78"/>
               </a:rPr>
               <a:t>وَمَا دَوْرُ الشَّبَابِ؟</a:t>
@@ -14894,6 +15016,7 @@
                   <a:srgbClr val="1B3B6F"/>
                 </a:solidFill>
                 <a:latin typeface="Amiri" pitchFamily="2" charset="-78"/>
+                <a:ea typeface="Amiri" pitchFamily="2" charset="-78"/>
                 <a:cs typeface="Amiri" pitchFamily="2" charset="-78"/>
               </a:rPr>
               <a:t>لَوْ كُنْتُ أَمِينَةً عَامَّةً لِيَوْمٍ وَاحِدٍ، لَدَعَوْتُ شَبَابًا مِنْ كُلِّ القَارَّاتِ لِيَجْلِسُوا مَكَانَ الرُّؤَسَاءِ، وَلَطَلَبْتُ مِنْهُمْ حَلًّا وَاحِدًا لِلْجُوعِ.</a:t>
@@ -14973,6 +15096,7 @@
                   <a:srgbClr val="1B3B6F"/>
                 </a:solidFill>
                 <a:latin typeface="Amiri" pitchFamily="2" charset="-78"/>
+                <a:ea typeface="Amiri" pitchFamily="2" charset="-78"/>
                 <a:cs typeface="Amiri" pitchFamily="2" charset="-78"/>
               </a:rPr>
               <a:t>لَوْ كُنْتَ أَمِينًا عَامًّا لِلْأُمَمِ المُتَّحِدَةِ لِيَوْمٍ وَاحِدٍ، مَاذَا تَفْعَلُ؟</a:t>
@@ -15182,6 +15306,7 @@
                   <a:srgbClr val="D4AF37"/>
                 </a:solidFill>
                 <a:latin typeface="Amiri" pitchFamily="2" charset="-78"/>
+                <a:ea typeface="Amiri" pitchFamily="2" charset="-78"/>
                 <a:cs typeface="Amiri" pitchFamily="2" charset="-78"/>
               </a:rPr>
               <a:t>م</a:t>
@@ -15502,6 +15627,7 @@
                   <a:srgbClr val="8A6D1E"/>
                 </a:solidFill>
                 <a:latin typeface="Amiri" pitchFamily="2" charset="-78"/>
+                <a:ea typeface="Amiri" pitchFamily="2" charset="-78"/>
                 <a:cs typeface="Amiri" pitchFamily="2" charset="-78"/>
               </a:rPr>
               <a:t>أَنَا وَالعَالَمُ</a:t>
@@ -15782,6 +15908,7 @@
                   <a:srgbClr val="1B3B6F"/>
                 </a:solidFill>
                 <a:latin typeface="Amiri" pitchFamily="2" charset="-78"/>
+                <a:ea typeface="Amiri" pitchFamily="2" charset="-78"/>
                 <a:cs typeface="Amiri" pitchFamily="2" charset="-78"/>
               </a:rPr>
               <a:t>صُنِعَ فِي …</a:t>
@@ -15858,6 +15985,7 @@
                   <a:srgbClr val="1B3B6F"/>
                 </a:solidFill>
                 <a:latin typeface="Amiri" pitchFamily="2" charset="-78"/>
+                <a:ea typeface="Amiri" pitchFamily="2" charset="-78"/>
                 <a:cs typeface="Amiri" pitchFamily="2" charset="-78"/>
               </a:rPr>
               <a:t>أَيْنَ صُنِعَ هَاتِفُكَ؟</a:t>
@@ -16026,6 +16154,7 @@
                   <a:srgbClr val="1B3B6F"/>
                 </a:solidFill>
                 <a:latin typeface="Amiri" pitchFamily="2" charset="-78"/>
+                <a:ea typeface="Amiri" pitchFamily="2" charset="-78"/>
                 <a:cs typeface="Amiri" pitchFamily="2" charset="-78"/>
               </a:rPr>
               <a:t>نَعَمْ، عِنْدِي … فِي …</a:t>
@@ -16102,6 +16231,7 @@
                   <a:srgbClr val="1B3B6F"/>
                 </a:solidFill>
                 <a:latin typeface="Amiri" pitchFamily="2" charset="-78"/>
+                <a:ea typeface="Amiri" pitchFamily="2" charset="-78"/>
                 <a:cs typeface="Amiri" pitchFamily="2" charset="-78"/>
               </a:rPr>
               <a:t>هَلْ عِنْدَكَ أَصْدِقَاءُ فِي بُلْدَانٍ أُخْرَى؟</a:t>
@@ -16270,6 +16400,7 @@
                   <a:srgbClr val="1B3B6F"/>
                 </a:solidFill>
                 <a:latin typeface="Amiri" pitchFamily="2" charset="-78"/>
+                <a:ea typeface="Amiri" pitchFamily="2" charset="-78"/>
                 <a:cs typeface="Amiri" pitchFamily="2" charset="-78"/>
               </a:rPr>
               <a:t>تُهِمُّنِي قَضِيَّةُ …</a:t>
@@ -16346,6 +16477,7 @@
                   <a:srgbClr val="1B3B6F"/>
                 </a:solidFill>
                 <a:latin typeface="Amiri" pitchFamily="2" charset="-78"/>
+                <a:ea typeface="Amiri" pitchFamily="2" charset="-78"/>
                 <a:cs typeface="Amiri" pitchFamily="2" charset="-78"/>
               </a:rPr>
               <a:t>مَا القَضِيَّةُ العَالَمِيَّةُ الَّتِي تُهِمُّكَ؟</a:t>
@@ -16514,6 +16646,7 @@
                   <a:srgbClr val="1B3B6F"/>
                 </a:solidFill>
                 <a:latin typeface="Amiri" pitchFamily="2" charset="-78"/>
+                <a:ea typeface="Amiri" pitchFamily="2" charset="-78"/>
                 <a:cs typeface="Amiri" pitchFamily="2" charset="-78"/>
               </a:rPr>
               <a:t>نَعَمْ / لَا، … لِأَنَّ …</a:t>
@@ -16590,6 +16723,7 @@
                   <a:srgbClr val="1B3B6F"/>
                 </a:solidFill>
                 <a:latin typeface="Amiri" pitchFamily="2" charset="-78"/>
+                <a:ea typeface="Amiri" pitchFamily="2" charset="-78"/>
                 <a:cs typeface="Amiri" pitchFamily="2" charset="-78"/>
               </a:rPr>
               <a:t>هَلْ تُرِيدُ أَنْ تَعْمَلَ فِي الخَارِجِ؟</a:t>
@@ -16758,6 +16892,7 @@
                   <a:srgbClr val="1B3B6F"/>
                 </a:solidFill>
                 <a:latin typeface="Amiri" pitchFamily="2" charset="-78"/>
+                <a:ea typeface="Amiri" pitchFamily="2" charset="-78"/>
                 <a:cs typeface="Amiri" pitchFamily="2" charset="-78"/>
               </a:rPr>
               <a:t>أَعْرِفُ …</a:t>
@@ -16834,6 +16969,7 @@
                   <a:srgbClr val="1B3B6F"/>
                 </a:solidFill>
                 <a:latin typeface="Amiri" pitchFamily="2" charset="-78"/>
+                <a:ea typeface="Amiri" pitchFamily="2" charset="-78"/>
                 <a:cs typeface="Amiri" pitchFamily="2" charset="-78"/>
               </a:rPr>
               <a:t>مَا المُنَظَّمَةُ الدُّوَلِيَّةُ الَّتِي تَعْرِفُهَا؟</a:t>
@@ -16988,6 +17124,7 @@
                   <a:srgbClr val="1B3B6F"/>
                 </a:solidFill>
                 <a:latin typeface="Amiri" pitchFamily="2" charset="-78"/>
+                <a:ea typeface="Amiri" pitchFamily="2" charset="-78"/>
                 <a:cs typeface="Amiri" pitchFamily="2" charset="-78"/>
               </a:rPr>
               <a:t>صُنِعَ فِي</a:t>
@@ -17014,6 +17151,7 @@
                   <a:srgbClr val="1B3B6F"/>
                 </a:solidFill>
                 <a:latin typeface="Amiri" pitchFamily="2" charset="-78"/>
+                <a:ea typeface="Amiri" pitchFamily="2" charset="-78"/>
                 <a:cs typeface="Amiri" pitchFamily="2" charset="-78"/>
               </a:rPr>
               <a:t>عَفْوًا، هَلْ يُمْكِنُ أَنْ تُعِيدَ السُّؤَالَ؟</a:t>
@@ -17147,6 +17285,7 @@
                   <a:srgbClr val="D4AF37"/>
                 </a:solidFill>
                 <a:latin typeface="Amiri" pitchFamily="2" charset="-78"/>
+                <a:ea typeface="Amiri" pitchFamily="2" charset="-78"/>
                 <a:cs typeface="Amiri" pitchFamily="2" charset="-78"/>
               </a:rPr>
               <a:t>م</a:t>
@@ -17467,6 +17606,7 @@
                   <a:srgbClr val="8A6D1E"/>
                 </a:solidFill>
                 <a:latin typeface="Amiri" pitchFamily="2" charset="-78"/>
+                <a:ea typeface="Amiri" pitchFamily="2" charset="-78"/>
                 <a:cs typeface="Amiri" pitchFamily="2" charset="-78"/>
               </a:rPr>
               <a:t>الرَّوَابِطُ العَالَمِيَّةُ</a:t>
@@ -17747,6 +17887,7 @@
                   <a:srgbClr val="1B3B6F"/>
                 </a:solidFill>
                 <a:latin typeface="Amiri" pitchFamily="2" charset="-78"/>
+                <a:ea typeface="Amiri" pitchFamily="2" charset="-78"/>
                 <a:cs typeface="Amiri" pitchFamily="2" charset="-78"/>
               </a:rPr>
               <a:t>مَثَلًا، … صُنِعَ … وَ…</a:t>
@@ -17823,6 +17964,7 @@
                   <a:srgbClr val="1B3B6F"/>
                 </a:solidFill>
                 <a:latin typeface="Amiri" pitchFamily="2" charset="-78"/>
+                <a:ea typeface="Amiri" pitchFamily="2" charset="-78"/>
                 <a:cs typeface="Amiri" pitchFamily="2" charset="-78"/>
               </a:rPr>
               <a:t>كَيْفَ تَرْتَبِطُ حَيَاتُكَ اليَوْمِيَّةُ بِالعَالَمِ؟</a:t>
@@ -17926,6 +18068,7 @@
                   <a:srgbClr val="1B3B6F"/>
                 </a:solidFill>
                 <a:latin typeface="Amiri" pitchFamily="2" charset="-78"/>
+                <a:ea typeface="Amiri" pitchFamily="2" charset="-78"/>
                 <a:cs typeface="Amiri" pitchFamily="2" charset="-78"/>
               </a:rPr>
               <a:t>أَوَّلًا … بِالإِضَافَةِ إِلَى ذٰلِكَ …</a:t>
@@ -18002,6 +18145,7 @@
                   <a:srgbClr val="1B3B6F"/>
                 </a:solidFill>
                 <a:latin typeface="Amiri" pitchFamily="2" charset="-78"/>
+                <a:ea typeface="Amiri" pitchFamily="2" charset="-78"/>
                 <a:cs typeface="Amiri" pitchFamily="2" charset="-78"/>
               </a:rPr>
               <a:t>مَا فَوَائِدُ أَنْ يَكُونَ عِنْدَكَ أَصْدِقَاءُ مِنْ بُلْدَانٍ أُخْرَى؟</a:t>
@@ -18105,6 +18249,7 @@
                   <a:srgbClr val="1B3B6F"/>
                 </a:solidFill>
                 <a:latin typeface="Amiri" pitchFamily="2" charset="-78"/>
+                <a:ea typeface="Amiri" pitchFamily="2" charset="-78"/>
                 <a:cs typeface="Amiri" pitchFamily="2" charset="-78"/>
               </a:rPr>
               <a:t>نَعَمْ، شَارَكْتُ فِي … ؛ وَجُمِعَ …</a:t>
@@ -18181,6 +18326,7 @@
                   <a:srgbClr val="1B3B6F"/>
                 </a:solidFill>
                 <a:latin typeface="Amiri" pitchFamily="2" charset="-78"/>
+                <a:ea typeface="Amiri" pitchFamily="2" charset="-78"/>
                 <a:cs typeface="Amiri" pitchFamily="2" charset="-78"/>
               </a:rPr>
               <a:t>هَلْ تَطَوَّعْتَ لِقَضِيَّةٍ عَالَمِيَّةٍ؟</a:t>
@@ -18284,6 +18430,7 @@
                   <a:srgbClr val="1B3B6F"/>
                 </a:solidFill>
                 <a:latin typeface="Amiri" pitchFamily="2" charset="-78"/>
+                <a:ea typeface="Amiri" pitchFamily="2" charset="-78"/>
                 <a:cs typeface="Amiri" pitchFamily="2" charset="-78"/>
               </a:rPr>
               <a:t>إِذَا حَصَلْتُ عَلَى … فَسَأَدْرُسُ …</a:t>
@@ -18360,6 +18507,7 @@
                   <a:srgbClr val="1B3B6F"/>
                 </a:solidFill>
                 <a:latin typeface="Amiri" pitchFamily="2" charset="-78"/>
+                <a:ea typeface="Amiri" pitchFamily="2" charset="-78"/>
                 <a:cs typeface="Amiri" pitchFamily="2" charset="-78"/>
               </a:rPr>
               <a:t>هَلْ سَتَدْرُسُ أَوْ تَعْمَلُ فِي الخَارِجِ؟</a:t>
@@ -18463,6 +18611,7 @@
                   <a:srgbClr val="1B3B6F"/>
                 </a:solidFill>
                 <a:latin typeface="Amiri" pitchFamily="2" charset="-78"/>
+                <a:ea typeface="Amiri" pitchFamily="2" charset="-78"/>
                 <a:cs typeface="Amiri" pitchFamily="2" charset="-78"/>
               </a:rPr>
               <a:t>نَعَمْ، عِنْدَمَا … ؛ لِذٰلِكَ …</a:t>
@@ -18539,6 +18688,7 @@
                   <a:srgbClr val="1B3B6F"/>
                 </a:solidFill>
                 <a:latin typeface="Amiri" pitchFamily="2" charset="-78"/>
+                <a:ea typeface="Amiri" pitchFamily="2" charset="-78"/>
                 <a:cs typeface="Amiri" pitchFamily="2" charset="-78"/>
               </a:rPr>
               <a:t>هَلْ تُؤَثِّرُ الأَخْبَارُ العَالَمِيَّةُ فِيكَ؟</a:t>
@@ -18748,6 +18898,7 @@
                   <a:srgbClr val="D4AF37"/>
                 </a:solidFill>
                 <a:latin typeface="Amiri" pitchFamily="2" charset="-78"/>
+                <a:ea typeface="Amiri" pitchFamily="2" charset="-78"/>
                 <a:cs typeface="Amiri" pitchFamily="2" charset="-78"/>
               </a:rPr>
               <a:t>م</a:t>
@@ -19068,6 +19219,7 @@
                   <a:srgbClr val="8A6D1E"/>
                 </a:solidFill>
                 <a:latin typeface="Amiri" pitchFamily="2" charset="-78"/>
+                <a:ea typeface="Amiri" pitchFamily="2" charset="-78"/>
                 <a:cs typeface="Amiri" pitchFamily="2" charset="-78"/>
               </a:rPr>
               <a:t>العَوْلَمَةُ وَالمُوَاطَنَةُ العَالَمِيَّةُ</a:t>
@@ -19348,6 +19500,7 @@
                   <a:srgbClr val="1B3B6F"/>
                 </a:solidFill>
                 <a:latin typeface="Amiri" pitchFamily="2" charset="-78"/>
+                <a:ea typeface="Amiri" pitchFamily="2" charset="-78"/>
                 <a:cs typeface="Amiri" pitchFamily="2" charset="-78"/>
               </a:rPr>
               <a:t>مِنْ نَاحِيَةٍ … وَمِنْ نَاحِيَةٍ أُخْرَى …</a:t>
@@ -19424,6 +19577,7 @@
                   <a:srgbClr val="1B3B6F"/>
                 </a:solidFill>
                 <a:latin typeface="Amiri" pitchFamily="2" charset="-78"/>
+                <a:ea typeface="Amiri" pitchFamily="2" charset="-78"/>
                 <a:cs typeface="Amiri" pitchFamily="2" charset="-78"/>
               </a:rPr>
               <a:t>هَلِ العَوْلَمَةُ نِعْمَةٌ أَمْ نِقْمَةٌ؟</a:t>
@@ -19527,6 +19681,7 @@
                   <a:srgbClr val="1B3B6F"/>
                 </a:solidFill>
                 <a:latin typeface="Amiri" pitchFamily="2" charset="-78"/>
+                <a:ea typeface="Amiri" pitchFamily="2" charset="-78"/>
                 <a:cs typeface="Amiri" pitchFamily="2" charset="-78"/>
               </a:rPr>
               <a:t>أَنْ تَكُونَ … يَعْنِي أَنْ …</a:t>
@@ -19603,6 +19758,7 @@
                   <a:srgbClr val="1B3B6F"/>
                 </a:solidFill>
                 <a:latin typeface="Amiri" pitchFamily="2" charset="-78"/>
+                <a:ea typeface="Amiri" pitchFamily="2" charset="-78"/>
                 <a:cs typeface="Amiri" pitchFamily="2" charset="-78"/>
               </a:rPr>
               <a:t>مَا مَعْنَى أَنْ تَكُونَ "مُوَاطِنًا عَالَمِيًّا"؟</a:t>
@@ -19706,6 +19862,7 @@
                   <a:srgbClr val="1B3B6F"/>
                 </a:solidFill>
                 <a:latin typeface="Amiri" pitchFamily="2" charset="-78"/>
+                <a:ea typeface="Amiri" pitchFamily="2" charset="-78"/>
                 <a:cs typeface="Amiri" pitchFamily="2" charset="-78"/>
               </a:rPr>
               <a:t>صَحِيحٌ أَنَّ … غَيْرَ أَنَّ …</a:t>
@@ -19782,6 +19939,7 @@
                   <a:srgbClr val="1B3B6F"/>
                 </a:solidFill>
                 <a:latin typeface="Amiri" pitchFamily="2" charset="-78"/>
+                <a:ea typeface="Amiri" pitchFamily="2" charset="-78"/>
                 <a:cs typeface="Amiri" pitchFamily="2" charset="-78"/>
               </a:rPr>
               <a:t>هَلْ تَسْتَطِيعُ المُنَظَّمَاتُ الدُّوَلِيَّةُ حَلَّ المَشَاكِلِ الكُبْرَى؟</a:t>
@@ -19885,6 +20043,7 @@
                   <a:srgbClr val="1B3B6F"/>
                 </a:solidFill>
                 <a:latin typeface="Amiri" pitchFamily="2" charset="-78"/>
+                <a:ea typeface="Amiri" pitchFamily="2" charset="-78"/>
                 <a:cs typeface="Amiri" pitchFamily="2" charset="-78"/>
               </a:rPr>
               <a:t>كَانَتِ الرَّسَائِلُ … أَمَّا اليَوْمَ فَتُرْسَلُ …</a:t>
@@ -19961,6 +20120,7 @@
                   <a:srgbClr val="1B3B6F"/>
                 </a:solidFill>
                 <a:latin typeface="Amiri" pitchFamily="2" charset="-78"/>
+                <a:ea typeface="Amiri" pitchFamily="2" charset="-78"/>
                 <a:cs typeface="Amiri" pitchFamily="2" charset="-78"/>
               </a:rPr>
               <a:t>كَيْفَ تَغَيَّرَ تَوَاصُلُ النَّاسِ عَبْرَ العَالَمِ؟</a:t>
@@ -20064,6 +20224,7 @@
                   <a:srgbClr val="1B3B6F"/>
                 </a:solidFill>
                 <a:latin typeface="Amiri" pitchFamily="2" charset="-78"/>
+                <a:ea typeface="Amiri" pitchFamily="2" charset="-78"/>
                 <a:cs typeface="Amiri" pitchFamily="2" charset="-78"/>
               </a:rPr>
               <a:t>لَوِ اسْتَطَعْتُ، لَحَلَلْتُ … لِأَنَّ …</a:t>
@@ -20140,6 +20301,7 @@
                   <a:srgbClr val="1B3B6F"/>
                 </a:solidFill>
                 <a:latin typeface="Amiri" pitchFamily="2" charset="-78"/>
+                <a:ea typeface="Amiri" pitchFamily="2" charset="-78"/>
                 <a:cs typeface="Amiri" pitchFamily="2" charset="-78"/>
               </a:rPr>
               <a:t>لَوْ اسْتَطَعْتَ أَنْ تَحُلَّ مُشْكِلَةً عَالَمِيَّةً وَاحِدَةً، فَأَيُّهَا تَخْتَارُ؟</a:t>
@@ -20349,6 +20511,7 @@
                   <a:srgbClr val="D4AF37"/>
                 </a:solidFill>
                 <a:latin typeface="Amiri" pitchFamily="2" charset="-78"/>
+                <a:ea typeface="Amiri" pitchFamily="2" charset="-78"/>
                 <a:cs typeface="Amiri" pitchFamily="2" charset="-78"/>
               </a:rPr>
               <a:t>م</a:t>
@@ -20669,6 +20832,7 @@
                   <a:srgbClr val="8A6D1E"/>
                 </a:solidFill>
                 <a:latin typeface="Amiri" pitchFamily="2" charset="-78"/>
+                <a:ea typeface="Amiri" pitchFamily="2" charset="-78"/>
                 <a:cs typeface="Amiri" pitchFamily="2" charset="-78"/>
               </a:rPr>
               <a:t>آدَابُ الصَّفِّ</a:t>
@@ -22200,6 +22364,7 @@
                   <a:srgbClr val="D4AF37"/>
                 </a:solidFill>
                 <a:latin typeface="Amiri" pitchFamily="2" charset="-78"/>
+                <a:ea typeface="Amiri" pitchFamily="2" charset="-78"/>
                 <a:cs typeface="Amiri" pitchFamily="2" charset="-78"/>
               </a:rPr>
               <a:t>م</a:t>
@@ -22520,6 +22685,7 @@
                   <a:srgbClr val="8A6D1E"/>
                 </a:solidFill>
                 <a:latin typeface="Amiri" pitchFamily="2" charset="-78"/>
+                <a:ea typeface="Amiri" pitchFamily="2" charset="-78"/>
                 <a:cs typeface="Amiri" pitchFamily="2" charset="-78"/>
               </a:rPr>
               <a:t>نَمُوذَجُ الإِجَابَةِ</a:t>
@@ -22762,6 +22928,7 @@
                   <a:srgbClr val="1B3B6F"/>
                 </a:solidFill>
                 <a:latin typeface="Amiri" pitchFamily="2" charset="-78"/>
+                <a:ea typeface="Amiri" pitchFamily="2" charset="-78"/>
                 <a:cs typeface="Amiri" pitchFamily="2" charset="-78"/>
               </a:rPr>
               <a:t>صُنِعَ فِي كُورِيَا.</a:t>
@@ -22838,6 +23005,7 @@
                   <a:srgbClr val="1B3B6F"/>
                 </a:solidFill>
                 <a:latin typeface="Amiri" pitchFamily="2" charset="-78"/>
+                <a:ea typeface="Amiri" pitchFamily="2" charset="-78"/>
                 <a:cs typeface="Amiri" pitchFamily="2" charset="-78"/>
               </a:rPr>
               <a:t>أَيْنَ صُنِعَ هَاتِفُكَ؟</a:t>
@@ -22941,6 +23109,7 @@
                   <a:srgbClr val="1B3B6F"/>
                 </a:solidFill>
                 <a:latin typeface="Amiri" pitchFamily="2" charset="-78"/>
+                <a:ea typeface="Amiri" pitchFamily="2" charset="-78"/>
                 <a:cs typeface="Amiri" pitchFamily="2" charset="-78"/>
               </a:rPr>
               <a:t>نَعَمْ، عِنْدِي صَدِيقَةٌ فِي كَنَدَا، وَنَتَكَلَّمُ عَلَى الإِنْتَرْنِتِ.</a:t>
@@ -23017,6 +23186,7 @@
                   <a:srgbClr val="1B3B6F"/>
                 </a:solidFill>
                 <a:latin typeface="Amiri" pitchFamily="2" charset="-78"/>
+                <a:ea typeface="Amiri" pitchFamily="2" charset="-78"/>
                 <a:cs typeface="Amiri" pitchFamily="2" charset="-78"/>
               </a:rPr>
               <a:t>هَلْ عِنْدَكَ أَصْدِقَاءُ فِي بُلْدَانٍ أُخْرَى؟</a:t>
@@ -23120,6 +23290,7 @@
                   <a:srgbClr val="1B3B6F"/>
                 </a:solidFill>
                 <a:latin typeface="Amiri" pitchFamily="2" charset="-78"/>
+                <a:ea typeface="Amiri" pitchFamily="2" charset="-78"/>
                 <a:cs typeface="Amiri" pitchFamily="2" charset="-78"/>
               </a:rPr>
               <a:t>تُهِمُّنِي قَضِيَّةُ الفَقْرِ.</a:t>
@@ -23196,6 +23367,7 @@
                   <a:srgbClr val="1B3B6F"/>
                 </a:solidFill>
                 <a:latin typeface="Amiri" pitchFamily="2" charset="-78"/>
+                <a:ea typeface="Amiri" pitchFamily="2" charset="-78"/>
                 <a:cs typeface="Amiri" pitchFamily="2" charset="-78"/>
               </a:rPr>
               <a:t>مَا القَضِيَّةُ العَالَمِيَّةُ الَّتِي تُهِمُّكَ؟</a:t>
@@ -23299,6 +23471,7 @@
                   <a:srgbClr val="1B3B6F"/>
                 </a:solidFill>
                 <a:latin typeface="Amiri" pitchFamily="2" charset="-78"/>
+                <a:ea typeface="Amiri" pitchFamily="2" charset="-78"/>
                 <a:cs typeface="Amiri" pitchFamily="2" charset="-78"/>
               </a:rPr>
               <a:t>نَعَمْ، أُرِيدُ أَنْ أَعْمَلَ فِي دُبَيّ، لِأَنَّهَا مَدِينَةٌ دُوَلِيَّةٌ.</a:t>
@@ -23375,6 +23548,7 @@
                   <a:srgbClr val="1B3B6F"/>
                 </a:solidFill>
                 <a:latin typeface="Amiri" pitchFamily="2" charset="-78"/>
+                <a:ea typeface="Amiri" pitchFamily="2" charset="-78"/>
                 <a:cs typeface="Amiri" pitchFamily="2" charset="-78"/>
               </a:rPr>
               <a:t>هَلْ تُرِيدُ أَنْ تَعْمَلَ فِي الخَارِجِ؟</a:t>
@@ -23478,6 +23652,7 @@
                   <a:srgbClr val="1B3B6F"/>
                 </a:solidFill>
                 <a:latin typeface="Amiri" pitchFamily="2" charset="-78"/>
+                <a:ea typeface="Amiri" pitchFamily="2" charset="-78"/>
                 <a:cs typeface="Amiri" pitchFamily="2" charset="-78"/>
               </a:rPr>
               <a:t>أَعْرِفُ الأُمَمَ المُتَّحِدَةَ وَالصَّلِيبَ الأَحْمَرَ وَالهِلَالَ الأَحْمَرَ.</a:t>
@@ -23554,6 +23729,7 @@
                   <a:srgbClr val="1B3B6F"/>
                 </a:solidFill>
                 <a:latin typeface="Amiri" pitchFamily="2" charset="-78"/>
+                <a:ea typeface="Amiri" pitchFamily="2" charset="-78"/>
                 <a:cs typeface="Amiri" pitchFamily="2" charset="-78"/>
               </a:rPr>
               <a:t>مَا المُنَظَّمَةُ الدُّوَلِيَّةُ الَّتِي تَعْرِفُهَا؟</a:t>
@@ -23763,6 +23939,7 @@
                   <a:srgbClr val="D4AF37"/>
                 </a:solidFill>
                 <a:latin typeface="Amiri" pitchFamily="2" charset="-78"/>
+                <a:ea typeface="Amiri" pitchFamily="2" charset="-78"/>
                 <a:cs typeface="Amiri" pitchFamily="2" charset="-78"/>
               </a:rPr>
               <a:t>م</a:t>
@@ -24083,6 +24260,7 @@
                   <a:srgbClr val="8A6D1E"/>
                 </a:solidFill>
                 <a:latin typeface="Amiri" pitchFamily="2" charset="-78"/>
+                <a:ea typeface="Amiri" pitchFamily="2" charset="-78"/>
                 <a:cs typeface="Amiri" pitchFamily="2" charset="-78"/>
               </a:rPr>
               <a:t>نَمُوذَجُ الإِجَابَةِ</a:t>
@@ -24325,6 +24503,7 @@
                   <a:srgbClr val="1B3B6F"/>
                 </a:solidFill>
                 <a:latin typeface="Amiri" pitchFamily="2" charset="-78"/>
+                <a:ea typeface="Amiri" pitchFamily="2" charset="-78"/>
                 <a:cs typeface="Amiri" pitchFamily="2" charset="-78"/>
               </a:rPr>
               <a:t>مَثَلًا، مَلَابِسِي صُنِعَتْ فِي آسْيَا، وَأُشَاهِدُ مُسَلْسَلَاتٍ كُورِيَّةً، وَأَلْعَبُ عَلَى الإِنْتَرْنِتِ مَعَ شَبَابٍ مِنْ أُسْتُرَالْيَا.</a:t>
@@ -24401,6 +24580,7 @@
                   <a:srgbClr val="1B3B6F"/>
                 </a:solidFill>
                 <a:latin typeface="Amiri" pitchFamily="2" charset="-78"/>
+                <a:ea typeface="Amiri" pitchFamily="2" charset="-78"/>
                 <a:cs typeface="Amiri" pitchFamily="2" charset="-78"/>
               </a:rPr>
               <a:t>كَيْفَ تَرْتَبِطُ حَيَاتُكَ اليَوْمِيَّةُ بِالعَالَمِ؟</a:t>
@@ -24504,6 +24684,7 @@
                   <a:srgbClr val="1B3B6F"/>
                 </a:solidFill>
                 <a:latin typeface="Amiri" pitchFamily="2" charset="-78"/>
+                <a:ea typeface="Amiri" pitchFamily="2" charset="-78"/>
                 <a:cs typeface="Amiri" pitchFamily="2" charset="-78"/>
               </a:rPr>
               <a:t>أَوَّلًا، أَتَعَلَّمُ لُغَاتٍ وَعَادَاتٍ جَدِيدَةً؛ بِالإِضَافَةِ إِلَى ذٰلِكَ، إِذَا سَافَرْتُ يَوْمًا، فَسَيَكُونُ لِي أَصْدِقَاءُ هُنَاكَ.</a:t>
@@ -24583,6 +24764,7 @@
                   <a:srgbClr val="1B3B6F"/>
                 </a:solidFill>
                 <a:latin typeface="Amiri" pitchFamily="2" charset="-78"/>
+                <a:ea typeface="Amiri" pitchFamily="2" charset="-78"/>
                 <a:cs typeface="Amiri" pitchFamily="2" charset="-78"/>
               </a:rPr>
               <a:t>مَا فَوَائِدُ أَنْ يَكُونَ عِنْدَكَ أَصْدِقَاءُ مِنْ بُلْدَانٍ أُخْرَى؟</a:t>
@@ -24686,6 +24868,7 @@
                   <a:srgbClr val="1B3B6F"/>
                 </a:solidFill>
                 <a:latin typeface="Amiri" pitchFamily="2" charset="-78"/>
+                <a:ea typeface="Amiri" pitchFamily="2" charset="-78"/>
                 <a:cs typeface="Amiri" pitchFamily="2" charset="-78"/>
               </a:rPr>
               <a:t>نَعَمْ، شَارَكْتُ فِي حَمْلَةٍ مَدْرَسِيَّةٍ لِلَّاجِئِينَ، وَجُمِعَ أَكْثَرُ مِنْ أَلْفِ جُنَيْهٍ فِي أُسْبُوعٍ وَاحِدٍ.</a:t>
@@ -24762,6 +24945,7 @@
                   <a:srgbClr val="1B3B6F"/>
                 </a:solidFill>
                 <a:latin typeface="Amiri" pitchFamily="2" charset="-78"/>
+                <a:ea typeface="Amiri" pitchFamily="2" charset="-78"/>
                 <a:cs typeface="Amiri" pitchFamily="2" charset="-78"/>
               </a:rPr>
               <a:t>هَلْ تَطَوَّعْتَ لِقَضِيَّةٍ عَالَمِيَّةٍ؟</a:t>
@@ -24865,6 +25049,7 @@
                   <a:srgbClr val="1B3B6F"/>
                 </a:solidFill>
                 <a:latin typeface="Amiri" pitchFamily="2" charset="-78"/>
+                <a:ea typeface="Amiri" pitchFamily="2" charset="-78"/>
                 <a:cs typeface="Amiri" pitchFamily="2" charset="-78"/>
               </a:rPr>
               <a:t>إِذَا حَصَلْتُ عَلَى مِنْحَةٍ، فَسَأَدْرُسُ سَنَةً فِي فَرَنْسَا، لِأَنَّ ذٰلِكَ سَيُفِيدُنِي فِي عَمَلِي فِي المُسْتَقْبَلِ.</a:t>
@@ -24941,6 +25126,7 @@
                   <a:srgbClr val="1B3B6F"/>
                 </a:solidFill>
                 <a:latin typeface="Amiri" pitchFamily="2" charset="-78"/>
+                <a:ea typeface="Amiri" pitchFamily="2" charset="-78"/>
                 <a:cs typeface="Amiri" pitchFamily="2" charset="-78"/>
               </a:rPr>
               <a:t>هَلْ سَتَدْرُسُ أَوْ تَعْمَلُ فِي الخَارِجِ؟</a:t>
@@ -25044,6 +25230,7 @@
                   <a:srgbClr val="1B3B6F"/>
                 </a:solidFill>
                 <a:latin typeface="Amiri" pitchFamily="2" charset="-78"/>
+                <a:ea typeface="Amiri" pitchFamily="2" charset="-78"/>
                 <a:cs typeface="Amiri" pitchFamily="2" charset="-78"/>
               </a:rPr>
               <a:t>نَعَمْ، عِنْدَمَا أَرَى صُوَرَ الحُرُوبِ وَالكَوَارِثِ أَحْزَنُ كَثِيرًا؛ لِذٰلِكَ أَتَبَرَّعُ مِنْ مَصْرُوفِي كُلَّ شَهْرٍ.</a:t>
@@ -25120,6 +25307,7 @@
                   <a:srgbClr val="1B3B6F"/>
                 </a:solidFill>
                 <a:latin typeface="Amiri" pitchFamily="2" charset="-78"/>
+                <a:ea typeface="Amiri" pitchFamily="2" charset="-78"/>
                 <a:cs typeface="Amiri" pitchFamily="2" charset="-78"/>
               </a:rPr>
               <a:t>هَلْ تُؤَثِّرُ الأَخْبَارُ العَالَمِيَّةُ فِيكَ؟</a:t>
@@ -25329,6 +25517,7 @@
                   <a:srgbClr val="D4AF37"/>
                 </a:solidFill>
                 <a:latin typeface="Amiri" pitchFamily="2" charset="-78"/>
+                <a:ea typeface="Amiri" pitchFamily="2" charset="-78"/>
                 <a:cs typeface="Amiri" pitchFamily="2" charset="-78"/>
               </a:rPr>
               <a:t>م</a:t>
@@ -25649,6 +25838,7 @@
                   <a:srgbClr val="8A6D1E"/>
                 </a:solidFill>
                 <a:latin typeface="Amiri" pitchFamily="2" charset="-78"/>
+                <a:ea typeface="Amiri" pitchFamily="2" charset="-78"/>
                 <a:cs typeface="Amiri" pitchFamily="2" charset="-78"/>
               </a:rPr>
               <a:t>نَمُوذَجُ الإِجَابَةِ</a:t>
@@ -25894,6 +26084,7 @@
                   <a:srgbClr val="1B3B6F"/>
                 </a:solidFill>
                 <a:latin typeface="Amiri" pitchFamily="2" charset="-78"/>
+                <a:ea typeface="Amiri" pitchFamily="2" charset="-78"/>
                 <a:cs typeface="Amiri" pitchFamily="2" charset="-78"/>
               </a:rPr>
               <a:t>مِنْ نَاحِيَةٍ، فَتَحَتْ أَبْوَابَ المَعْرِفَةِ وَالتِّجَارَةِ لِلْجَمِيعِ، وَمِنْ نَاحِيَةٍ أُخْرَى، هَدَّدَتِ الصِّنَاعَاتِ المَحَلِّيَّةَ؛ فَهِيَ أَدَاةٌ، وَالنَّتِيجَةُ تَعْتَمِدُ عَلَى طَرِيقَةِ اسْتِخْدَامِهَا.</a:t>
@@ -25970,6 +26161,7 @@
                   <a:srgbClr val="1B3B6F"/>
                 </a:solidFill>
                 <a:latin typeface="Amiri" pitchFamily="2" charset="-78"/>
+                <a:ea typeface="Amiri" pitchFamily="2" charset="-78"/>
                 <a:cs typeface="Amiri" pitchFamily="2" charset="-78"/>
               </a:rPr>
               <a:t>هَلِ العَوْلَمَةُ نِعْمَةٌ أَمْ نِقْمَةٌ؟</a:t>
@@ -26073,6 +26265,7 @@
                   <a:srgbClr val="1B3B6F"/>
                 </a:solidFill>
                 <a:latin typeface="Amiri" pitchFamily="2" charset="-78"/>
+                <a:ea typeface="Amiri" pitchFamily="2" charset="-78"/>
                 <a:cs typeface="Amiri" pitchFamily="2" charset="-78"/>
               </a:rPr>
               <a:t>يَعْنِي أَنْ تُحِبَّ وَطَنَكَ، وَتَشْعُرَ فِي الوَقْتِ نَفْسِهِ بِالمَسْؤُولِيَّةِ تِجَاهَ إِنْسَانٍ لَمْ تَرَهُ فِي الطَّرَفِ الآخَرِ مِنَ العَالَمِ.</a:t>
@@ -26149,6 +26342,7 @@
                   <a:srgbClr val="1B3B6F"/>
                 </a:solidFill>
                 <a:latin typeface="Amiri" pitchFamily="2" charset="-78"/>
+                <a:ea typeface="Amiri" pitchFamily="2" charset="-78"/>
                 <a:cs typeface="Amiri" pitchFamily="2" charset="-78"/>
               </a:rPr>
               <a:t>مَا مَعْنَى أَنْ تَكُونَ "مُوَاطِنًا عَالَمِيًّا"؟</a:t>
@@ -26252,6 +26446,7 @@
                   <a:srgbClr val="1B3B6F"/>
                 </a:solidFill>
                 <a:latin typeface="Amiri" pitchFamily="2" charset="-78"/>
+                <a:ea typeface="Amiri" pitchFamily="2" charset="-78"/>
                 <a:cs typeface="Amiri" pitchFamily="2" charset="-78"/>
               </a:rPr>
               <a:t>صَحِيحٌ أَنَّهَا بَطِيئَةٌ أَحْيَانًا، غَيْرَ أَنَّ مَلَايِينَ الأَطْفَالِ تَلَقَّوُا اللِّقَاحَاتِ بِفَضْلِهَا، مِمَّا يُثْبِتُ أَنَّ التَّعَاوُنَ يَنْجَحُ إِذَا تَوَفَّرَتِ الإِرَادَةُ.</a:t>
@@ -26331,6 +26526,7 @@
                   <a:srgbClr val="1B3B6F"/>
                 </a:solidFill>
                 <a:latin typeface="Amiri" pitchFamily="2" charset="-78"/>
+                <a:ea typeface="Amiri" pitchFamily="2" charset="-78"/>
                 <a:cs typeface="Amiri" pitchFamily="2" charset="-78"/>
               </a:rPr>
               <a:t>هَلْ تَسْتَطِيعُ المُنَظَّمَاتُ الدُّوَلِيَّةُ حَلَّ المَشَاكِلِ الكُبْرَى؟</a:t>
@@ -26540,6 +26736,7 @@
                   <a:srgbClr val="D4AF37"/>
                 </a:solidFill>
                 <a:latin typeface="Amiri" pitchFamily="2" charset="-78"/>
+                <a:ea typeface="Amiri" pitchFamily="2" charset="-78"/>
                 <a:cs typeface="Amiri" pitchFamily="2" charset="-78"/>
               </a:rPr>
               <a:t>م</a:t>
@@ -26860,6 +27057,7 @@
                   <a:srgbClr val="8A6D1E"/>
                 </a:solidFill>
                 <a:latin typeface="Amiri" pitchFamily="2" charset="-78"/>
+                <a:ea typeface="Amiri" pitchFamily="2" charset="-78"/>
                 <a:cs typeface="Amiri" pitchFamily="2" charset="-78"/>
               </a:rPr>
               <a:t>نَمُوذَجُ الإِجَابَةِ</a:t>
@@ -27102,6 +27300,7 @@
                   <a:srgbClr val="1B3B6F"/>
                 </a:solidFill>
                 <a:latin typeface="Amiri" pitchFamily="2" charset="-78"/>
+                <a:ea typeface="Amiri" pitchFamily="2" charset="-78"/>
                 <a:cs typeface="Amiri" pitchFamily="2" charset="-78"/>
               </a:rPr>
               <a:t>كَانَتِ الرَّسَائِلُ تَصِلُ بَعْدَ أَسَابِيعَ، أَمَّا اليَوْمَ فَتُرْسَلُ فِي ثَوَانٍ، مِمَّا جَعَلَ العَالَمَ قَرْيَةً صَغِيرَةً، وَلٰكِنْ مُزْدَحِمَةً بِالمَعْلُومَاتِ الكَاذِبَةِ أَيْضًا.</a:t>
@@ -27178,6 +27377,7 @@
                   <a:srgbClr val="1B3B6F"/>
                 </a:solidFill>
                 <a:latin typeface="Amiri" pitchFamily="2" charset="-78"/>
+                <a:ea typeface="Amiri" pitchFamily="2" charset="-78"/>
                 <a:cs typeface="Amiri" pitchFamily="2" charset="-78"/>
               </a:rPr>
               <a:t>كَيْفَ تَغَيَّرَ تَوَاصُلُ النَّاسِ عَبْرَ العَالَمِ؟</a:t>
@@ -27284,6 +27484,7 @@
                   <a:srgbClr val="1B3B6F"/>
                 </a:solidFill>
                 <a:latin typeface="Amiri" pitchFamily="2" charset="-78"/>
+                <a:ea typeface="Amiri" pitchFamily="2" charset="-78"/>
                 <a:cs typeface="Amiri" pitchFamily="2" charset="-78"/>
               </a:rPr>
               <a:t>لَوِ اسْتَطَعْتُ، لَحَلَلْتُ مُشْكِلَةَ المِيَاهِ النَّظِيفَةِ، لِأَنَّهَا أَسَاسُ الصِّحَّةِ وَالتَّعْلِيمِ؛ فَالطِّفْلُ الَّذِي يَمْشِي سَاعَاتٍ لِيَجْلِبَ المَاءَ لَا يَذْهَبُ إِلَى المَدْرَسَةِ.</a:t>
@@ -27363,6 +27564,7 @@
                   <a:srgbClr val="1B3B6F"/>
                 </a:solidFill>
                 <a:latin typeface="Amiri" pitchFamily="2" charset="-78"/>
+                <a:ea typeface="Amiri" pitchFamily="2" charset="-78"/>
                 <a:cs typeface="Amiri" pitchFamily="2" charset="-78"/>
               </a:rPr>
               <a:t>لَوْ اسْتَطَعْتَ أَنْ تَحُلَّ مُشْكِلَةً عَالَمِيَّةً وَاحِدَةً، فَأَيُّهَا تَخْتَارُ؟</a:t>
@@ -27572,6 +27774,7 @@
                   <a:srgbClr val="D4AF37"/>
                 </a:solidFill>
                 <a:latin typeface="Amiri" pitchFamily="2" charset="-78"/>
+                <a:ea typeface="Amiri" pitchFamily="2" charset="-78"/>
                 <a:cs typeface="Amiri" pitchFamily="2" charset="-78"/>
               </a:rPr>
               <a:t>م</a:t>
@@ -27892,6 +28095,7 @@
                   <a:srgbClr val="8A6D1E"/>
                 </a:solidFill>
                 <a:latin typeface="Amiri" pitchFamily="2" charset="-78"/>
+                <a:ea typeface="Amiri" pitchFamily="2" charset="-78"/>
                 <a:cs typeface="Amiri" pitchFamily="2" charset="-78"/>
               </a:rPr>
               <a:t>قَيِّمْ عَمَلَكَ</a:t>
@@ -29136,6 +29340,7 @@
                   <a:srgbClr val="FFFFFF"/>
                 </a:solidFill>
                 <a:latin typeface="Amiri" pitchFamily="2" charset="-78"/>
+                <a:ea typeface="Amiri" pitchFamily="2" charset="-78"/>
                 <a:cs typeface="Amiri" pitchFamily="2" charset="-78"/>
               </a:rPr>
               <a:t>أَحْسَنْتُمْ! إِلَى اللِّقَاءِ</a:t>
@@ -29288,6 +29493,7 @@
                   <a:srgbClr val="D4AF37"/>
                 </a:solidFill>
                 <a:latin typeface="Amiri" pitchFamily="2" charset="-78"/>
+                <a:ea typeface="Amiri" pitchFamily="2" charset="-78"/>
                 <a:cs typeface="Amiri" pitchFamily="2" charset="-78"/>
               </a:rPr>
               <a:t>وَرْشَةُ الكِتَابَةِ</a:t>
@@ -29421,6 +29627,7 @@
                   <a:srgbClr val="D4AF37"/>
                 </a:solidFill>
                 <a:latin typeface="Amiri" pitchFamily="2" charset="-78"/>
+                <a:ea typeface="Amiri" pitchFamily="2" charset="-78"/>
                 <a:cs typeface="Amiri" pitchFamily="2" charset="-78"/>
               </a:rPr>
               <a:t>م</a:t>
@@ -29741,6 +29948,7 @@
                   <a:srgbClr val="8A6D1E"/>
                 </a:solidFill>
                 <a:latin typeface="Amiri" pitchFamily="2" charset="-78"/>
+                <a:ea typeface="Amiri" pitchFamily="2" charset="-78"/>
                 <a:cs typeface="Amiri" pitchFamily="2" charset="-78"/>
               </a:rPr>
               <a:t>خَرِيطَةُ الوَرْشَةِ</a:t>
@@ -30055,6 +30263,7 @@
                   <a:srgbClr val="1B3B6F"/>
                 </a:solidFill>
                 <a:latin typeface="Amiri" pitchFamily="2" charset="-78"/>
+                <a:ea typeface="Amiri" pitchFamily="2" charset="-78"/>
                 <a:cs typeface="Amiri" pitchFamily="2" charset="-78"/>
               </a:rPr>
               <a:t>كَيْفَ</a:t>
@@ -30331,6 +30540,7 @@
                   <a:srgbClr val="1E6B52"/>
                 </a:solidFill>
                 <a:latin typeface="Amiri" pitchFamily="2" charset="-78"/>
+                <a:ea typeface="Amiri" pitchFamily="2" charset="-78"/>
                 <a:cs typeface="Amiri" pitchFamily="2" charset="-78"/>
               </a:rPr>
               <a:t>تَمْثِيلُ الدَّوْرِ</a:t>
@@ -30607,6 +30817,7 @@
                   <a:srgbClr val="8A6D1E"/>
                 </a:solidFill>
                 <a:latin typeface="Amiri" pitchFamily="2" charset="-78"/>
+                <a:ea typeface="Amiri" pitchFamily="2" charset="-78"/>
                 <a:cs typeface="Amiri" pitchFamily="2" charset="-78"/>
               </a:rPr>
               <a:t>النَّمُوذَجُ</a:t>
@@ -30883,6 +31094,7 @@
                   <a:srgbClr val="1E6B52"/>
                 </a:solidFill>
                 <a:latin typeface="Amiri" pitchFamily="2" charset="-78"/>
+                <a:ea typeface="Amiri" pitchFamily="2" charset="-78"/>
                 <a:cs typeface="Amiri" pitchFamily="2" charset="-78"/>
               </a:rPr>
               <a:t>المُحَادَثَةُ</a:t>
@@ -31159,6 +31371,7 @@
                   <a:srgbClr val="8A6D1E"/>
                 </a:solidFill>
                 <a:latin typeface="Amiri" pitchFamily="2" charset="-78"/>
+                <a:ea typeface="Amiri" pitchFamily="2" charset="-78"/>
                 <a:cs typeface="Amiri" pitchFamily="2" charset="-78"/>
               </a:rPr>
               <a:t>قَيِّمْ</a:t>
@@ -31402,6 +31615,7 @@
                   <a:srgbClr val="D4AF37"/>
                 </a:solidFill>
                 <a:latin typeface="Amiri" pitchFamily="2" charset="-78"/>
+                <a:ea typeface="Amiri" pitchFamily="2" charset="-78"/>
                 <a:cs typeface="Amiri" pitchFamily="2" charset="-78"/>
               </a:rPr>
               <a:t>م</a:t>
@@ -31722,6 +31936,7 @@
                   <a:srgbClr val="8A6D1E"/>
                 </a:solidFill>
                 <a:latin typeface="Amiri" pitchFamily="2" charset="-78"/>
+                <a:ea typeface="Amiri" pitchFamily="2" charset="-78"/>
                 <a:cs typeface="Amiri" pitchFamily="2" charset="-78"/>
               </a:rPr>
               <a:t>امْتِحَانُ التَّحَدُّثِ</a:t>
@@ -32346,6 +32561,7 @@
                   <a:srgbClr val="1B3B6F"/>
                 </a:solidFill>
                 <a:latin typeface="Amiri" pitchFamily="2" charset="-78"/>
+                <a:ea typeface="Amiri" pitchFamily="2" charset="-78"/>
                 <a:cs typeface="Amiri" pitchFamily="2" charset="-78"/>
               </a:rPr>
               <a:t>عَفْوًا، هَلْ يُمْكِنُ أَنْ تُعِيدَ السُّؤَالَ؟</a:t>
@@ -32445,6 +32661,7 @@
                   <a:srgbClr val="1B3B6F"/>
                 </a:solidFill>
                 <a:latin typeface="Amiri" pitchFamily="2" charset="-78"/>
+                <a:ea typeface="Amiri" pitchFamily="2" charset="-78"/>
                 <a:cs typeface="Amiri" pitchFamily="2" charset="-78"/>
               </a:rPr>
               <a:t>لَحْظَةً، دَعْنِي أُفَكِّرُ …</a:t>
@@ -32544,6 +32761,7 @@
                   <a:srgbClr val="1B3B6F"/>
                 </a:solidFill>
                 <a:latin typeface="Amiri" pitchFamily="2" charset="-78"/>
+                <a:ea typeface="Amiri" pitchFamily="2" charset="-78"/>
                 <a:cs typeface="Amiri" pitchFamily="2" charset="-78"/>
               </a:rPr>
               <a:t>أَقْصِدُ …</a:t>
@@ -32715,6 +32933,7 @@
                   <a:srgbClr val="D4AF37"/>
                 </a:solidFill>
                 <a:latin typeface="Amiri" pitchFamily="2" charset="-78"/>
+                <a:ea typeface="Amiri" pitchFamily="2" charset="-78"/>
                 <a:cs typeface="Amiri" pitchFamily="2" charset="-78"/>
               </a:rPr>
               <a:t>م</a:t>
@@ -33035,6 +33254,7 @@
                   <a:srgbClr val="8A6D1E"/>
                 </a:solidFill>
                 <a:latin typeface="Amiri" pitchFamily="2" charset="-78"/>
+                <a:ea typeface="Amiri" pitchFamily="2" charset="-78"/>
                 <a:cs typeface="Amiri" pitchFamily="2" charset="-78"/>
               </a:rPr>
               <a:t>أَدَوَاتُ الشَّرْطِ</a:t>
@@ -33338,6 +33558,7 @@
                   <a:srgbClr val="1B3B6F"/>
                 </a:solidFill>
                 <a:latin typeface="Amiri" pitchFamily="2" charset="-78"/>
+                <a:ea typeface="Amiri" pitchFamily="2" charset="-78"/>
                 <a:cs typeface="Amiri" pitchFamily="2" charset="-78"/>
               </a:rPr>
               <a:t>عَالَمِيٌّ</a:t>
@@ -33495,6 +33716,7 @@
                   <a:srgbClr val="1B3B6F"/>
                 </a:solidFill>
                 <a:latin typeface="Amiri" pitchFamily="2" charset="-78"/>
+                <a:ea typeface="Amiri" pitchFamily="2" charset="-78"/>
                 <a:cs typeface="Amiri" pitchFamily="2" charset="-78"/>
               </a:rPr>
               <a:t>العَالَمُ</a:t>
@@ -33598,6 +33820,7 @@
                   <a:srgbClr val="1B3B6F"/>
                 </a:solidFill>
                 <a:latin typeface="Amiri" pitchFamily="2" charset="-78"/>
+                <a:ea typeface="Amiri" pitchFamily="2" charset="-78"/>
                 <a:cs typeface="Amiri" pitchFamily="2" charset="-78"/>
               </a:rPr>
               <a:t>عَالَمِيَّةٌ</a:t>
@@ -33863,6 +34086,7 @@
                   <a:srgbClr val="1B3B6F"/>
                 </a:solidFill>
                 <a:latin typeface="Amiri" pitchFamily="2" charset="-78"/>
+                <a:ea typeface="Amiri" pitchFamily="2" charset="-78"/>
                 <a:cs typeface="Amiri" pitchFamily="2" charset="-78"/>
               </a:rPr>
               <a:t>العَوْلَمَةُ</a:t>
@@ -34020,6 +34244,7 @@
                   <a:srgbClr val="1B3B6F"/>
                 </a:solidFill>
                 <a:latin typeface="Amiri" pitchFamily="2" charset="-78"/>
+                <a:ea typeface="Amiri" pitchFamily="2" charset="-78"/>
                 <a:cs typeface="Amiri" pitchFamily="2" charset="-78"/>
               </a:rPr>
               <a:t>رَوَابِطُ</a:t>
@@ -34123,6 +34348,7 @@
                   <a:srgbClr val="1B3B6F"/>
                 </a:solidFill>
                 <a:latin typeface="Amiri" pitchFamily="2" charset="-78"/>
+                <a:ea typeface="Amiri" pitchFamily="2" charset="-78"/>
                 <a:cs typeface="Amiri" pitchFamily="2" charset="-78"/>
               </a:rPr>
               <a:t>مُوَاطِنٌ عَالَمِيٌّ · مُوَاطِنَةٌ عَالَمِيَّةٌ</a:t>
@@ -34388,6 +34614,7 @@
                   <a:srgbClr val="1B3B6F"/>
                 </a:solidFill>
                 <a:latin typeface="Amiri" pitchFamily="2" charset="-78"/>
+                <a:ea typeface="Amiri" pitchFamily="2" charset="-78"/>
                 <a:cs typeface="Amiri" pitchFamily="2" charset="-78"/>
               </a:rPr>
               <a:t>صُنِعَ فِي …</a:t>
@@ -34545,6 +34772,7 @@
                   <a:srgbClr val="1B3B6F"/>
                 </a:solidFill>
                 <a:latin typeface="Amiri" pitchFamily="2" charset="-78"/>
+                <a:ea typeface="Amiri" pitchFamily="2" charset="-78"/>
                 <a:cs typeface="Amiri" pitchFamily="2" charset="-78"/>
               </a:rPr>
               <a:t>يُصَدَّرُ</a:t>
@@ -34648,6 +34876,7 @@
                   <a:srgbClr val="1B3B6F"/>
                 </a:solidFill>
                 <a:latin typeface="Amiri" pitchFamily="2" charset="-78"/>
+                <a:ea typeface="Amiri" pitchFamily="2" charset="-78"/>
                 <a:cs typeface="Amiri" pitchFamily="2" charset="-78"/>
               </a:rPr>
               <a:t>صُنِعَتْ فِي …</a:t>
@@ -34913,6 +35142,7 @@
                   <a:srgbClr val="1B3B6F"/>
                 </a:solidFill>
                 <a:latin typeface="Amiri" pitchFamily="2" charset="-78"/>
+                <a:ea typeface="Amiri" pitchFamily="2" charset="-78"/>
                 <a:cs typeface="Amiri" pitchFamily="2" charset="-78"/>
               </a:rPr>
               <a:t>مُنَظَّمَةٌ دُوَلِيَّةٌ</a:t>
@@ -35070,6 +35300,7 @@
                   <a:srgbClr val="1B3B6F"/>
                 </a:solidFill>
                 <a:latin typeface="Amiri" pitchFamily="2" charset="-78"/>
+                <a:ea typeface="Amiri" pitchFamily="2" charset="-78"/>
                 <a:cs typeface="Amiri" pitchFamily="2" charset="-78"/>
               </a:rPr>
               <a:t>جَمْعِيَّةٌ خَيْرِيَّةٌ</a:t>
@@ -35173,6 +35404,7 @@
                   <a:srgbClr val="1B3B6F"/>
                 </a:solidFill>
                 <a:latin typeface="Amiri" pitchFamily="2" charset="-78"/>
+                <a:ea typeface="Amiri" pitchFamily="2" charset="-78"/>
                 <a:cs typeface="Amiri" pitchFamily="2" charset="-78"/>
               </a:rPr>
               <a:t>الأُمَمُ المُتَّحِدَةُ</a:t>
@@ -35438,6 +35670,7 @@
                   <a:srgbClr val="1B3B6F"/>
                 </a:solidFill>
                 <a:latin typeface="Amiri" pitchFamily="2" charset="-78"/>
+                <a:ea typeface="Amiri" pitchFamily="2" charset="-78"/>
                 <a:cs typeface="Amiri" pitchFamily="2" charset="-78"/>
               </a:rPr>
               <a:t>نَمُوذَجُ الأُمَمِ المُتَّحِدَةِ</a:t>
@@ -35595,6 +35828,7 @@
                   <a:srgbClr val="1B3B6F"/>
                 </a:solidFill>
                 <a:latin typeface="Amiri" pitchFamily="2" charset="-78"/>
+                <a:ea typeface="Amiri" pitchFamily="2" charset="-78"/>
                 <a:cs typeface="Amiri" pitchFamily="2" charset="-78"/>
               </a:rPr>
               <a:t>مُؤْتَمَرٌ</a:t>
@@ -35698,6 +35932,7 @@
                   <a:srgbClr val="1B3B6F"/>
                 </a:solidFill>
                 <a:latin typeface="Amiri" pitchFamily="2" charset="-78"/>
+                <a:ea typeface="Amiri" pitchFamily="2" charset="-78"/>
                 <a:cs typeface="Amiri" pitchFamily="2" charset="-78"/>
               </a:rPr>
               <a:t>مَنْدُوبٌ · مَنْدُوبَةٌ</a:t>
@@ -35963,6 +36198,7 @@
                   <a:srgbClr val="1B3B6F"/>
                 </a:solidFill>
                 <a:latin typeface="Amiri" pitchFamily="2" charset="-78"/>
+                <a:ea typeface="Amiri" pitchFamily="2" charset="-78"/>
                 <a:cs typeface="Amiri" pitchFamily="2" charset="-78"/>
               </a:rPr>
               <a:t>قَضِيَّةٌ عَالَمِيَّةٌ</a:t>
@@ -36120,6 +36356,7 @@
                   <a:srgbClr val="1B3B6F"/>
                 </a:solidFill>
                 <a:latin typeface="Amiri" pitchFamily="2" charset="-78"/>
+                <a:ea typeface="Amiri" pitchFamily="2" charset="-78"/>
                 <a:cs typeface="Amiri" pitchFamily="2" charset="-78"/>
               </a:rPr>
               <a:t>الفَقْرُ</a:t>
@@ -36223,6 +36460,7 @@
                   <a:srgbClr val="1B3B6F"/>
                 </a:solidFill>
                 <a:latin typeface="Amiri" pitchFamily="2" charset="-78"/>
+                <a:ea typeface="Amiri" pitchFamily="2" charset="-78"/>
                 <a:cs typeface="Amiri" pitchFamily="2" charset="-78"/>
               </a:rPr>
               <a:t>تَغَيُّرُ المُنَاخِ</a:t>
@@ -36356,6 +36594,7 @@
                   <a:srgbClr val="D4AF37"/>
                 </a:solidFill>
                 <a:latin typeface="Amiri" pitchFamily="2" charset="-78"/>
+                <a:ea typeface="Amiri" pitchFamily="2" charset="-78"/>
                 <a:cs typeface="Amiri" pitchFamily="2" charset="-78"/>
               </a:rPr>
               <a:t>م</a:t>
@@ -36676,6 +36915,7 @@
                   <a:srgbClr val="8A6D1E"/>
                 </a:solidFill>
                 <a:latin typeface="Amiri" pitchFamily="2" charset="-78"/>
+                <a:ea typeface="Amiri" pitchFamily="2" charset="-78"/>
                 <a:cs typeface="Amiri" pitchFamily="2" charset="-78"/>
               </a:rPr>
               <a:t>المَجْهُولُ وَالرَّأْيُ المُتَوَازِنُ</a:t>
@@ -36979,6 +37219,7 @@
                   <a:srgbClr val="1B3B6F"/>
                 </a:solidFill>
                 <a:latin typeface="Amiri" pitchFamily="2" charset="-78"/>
+                <a:ea typeface="Amiri" pitchFamily="2" charset="-78"/>
                 <a:cs typeface="Amiri" pitchFamily="2" charset="-78"/>
               </a:rPr>
               <a:t>إِذَا … فَسَوْفَ …</a:t>
@@ -37136,6 +37377,7 @@
                   <a:srgbClr val="1B3B6F"/>
                 </a:solidFill>
                 <a:latin typeface="Amiri" pitchFamily="2" charset="-78"/>
+                <a:ea typeface="Amiri" pitchFamily="2" charset="-78"/>
                 <a:cs typeface="Amiri" pitchFamily="2" charset="-78"/>
               </a:rPr>
               <a:t>لَوْ سَافَرْتُ لَتَعَلَّمْتُ</a:t>
@@ -37239,6 +37481,7 @@
                   <a:srgbClr val="1B3B6F"/>
                 </a:solidFill>
                 <a:latin typeface="Amiri" pitchFamily="2" charset="-78"/>
+                <a:ea typeface="Amiri" pitchFamily="2" charset="-78"/>
                 <a:cs typeface="Amiri" pitchFamily="2" charset="-78"/>
               </a:rPr>
               <a:t>إِنْ تَدْرُسْ تَنْجَحْ</a:t>
@@ -37504,6 +37747,7 @@
                   <a:srgbClr val="1B3B6F"/>
                 </a:solidFill>
                 <a:latin typeface="Amiri" pitchFamily="2" charset="-78"/>
+                <a:ea typeface="Amiri" pitchFamily="2" charset="-78"/>
                 <a:cs typeface="Amiri" pitchFamily="2" charset="-78"/>
               </a:rPr>
               <a:t>أَتَطَوَّعُ فِي الخَارِجِ</a:t>
@@ -37661,6 +37905,7 @@
                   <a:srgbClr val="1B3B6F"/>
                 </a:solidFill>
                 <a:latin typeface="Amiri" pitchFamily="2" charset="-78"/>
+                <a:ea typeface="Amiri" pitchFamily="2" charset="-78"/>
                 <a:cs typeface="Amiri" pitchFamily="2" charset="-78"/>
               </a:rPr>
               <a:t>العَمَلُ فِي الخَارِجِ</a:t>
@@ -37764,6 +38009,7 @@
                   <a:srgbClr val="1B3B6F"/>
                 </a:solidFill>
                 <a:latin typeface="Amiri" pitchFamily="2" charset="-78"/>
+                <a:ea typeface="Amiri" pitchFamily="2" charset="-78"/>
                 <a:cs typeface="Amiri" pitchFamily="2" charset="-78"/>
               </a:rPr>
               <a:t>سَنَةٌ فَاصِلَةٌ</a:t>
@@ -38029,6 +38275,7 @@
                   <a:srgbClr val="1B3B6F"/>
                 </a:solidFill>
                 <a:latin typeface="Amiri" pitchFamily="2" charset="-78"/>
+                <a:ea typeface="Amiri" pitchFamily="2" charset="-78"/>
                 <a:cs typeface="Amiri" pitchFamily="2" charset="-78"/>
               </a:rPr>
               <a:t>مِنْ نَاحِيَةٍ … وَمِنْ نَاحِيَةٍ أُخْرَى</a:t>
@@ -38186,6 +38433,7 @@
                   <a:srgbClr val="1B3B6F"/>
                 </a:solidFill>
                 <a:latin typeface="Amiri" pitchFamily="2" charset="-78"/>
+                <a:ea typeface="Amiri" pitchFamily="2" charset="-78"/>
                 <a:cs typeface="Amiri" pitchFamily="2" charset="-78"/>
               </a:rPr>
               <a:t>عُيُوبٌ</a:t>
@@ -38289,6 +38537,7 @@
                   <a:srgbClr val="1B3B6F"/>
                 </a:solidFill>
                 <a:latin typeface="Amiri" pitchFamily="2" charset="-78"/>
+                <a:ea typeface="Amiri" pitchFamily="2" charset="-78"/>
                 <a:cs typeface="Amiri" pitchFamily="2" charset="-78"/>
               </a:rPr>
               <a:t>مَزَايَا</a:t>
@@ -38554,6 +38803,7 @@
                   <a:srgbClr val="1B3B6F"/>
                 </a:solidFill>
                 <a:latin typeface="Amiri" pitchFamily="2" charset="-78"/>
+                <a:ea typeface="Amiri" pitchFamily="2" charset="-78"/>
                 <a:cs typeface="Amiri" pitchFamily="2" charset="-78"/>
               </a:rPr>
               <a:t>يُنَاقَشُ · تُنَاقَشُ</a:t>
@@ -38711,6 +38961,7 @@
                   <a:srgbClr val="1B3B6F"/>
                 </a:solidFill>
                 <a:latin typeface="Amiri" pitchFamily="2" charset="-78"/>
+                <a:ea typeface="Amiri" pitchFamily="2" charset="-78"/>
                 <a:cs typeface="Amiri" pitchFamily="2" charset="-78"/>
               </a:rPr>
               <a:t>صُوِّتَ عَلَى</a:t>
@@ -38814,6 +39065,7 @@
                   <a:srgbClr val="1B3B6F"/>
                 </a:solidFill>
                 <a:latin typeface="Amiri" pitchFamily="2" charset="-78"/>
+                <a:ea typeface="Amiri" pitchFamily="2" charset="-78"/>
                 <a:cs typeface="Amiri" pitchFamily="2" charset="-78"/>
               </a:rPr>
               <a:t>قُرِّرَ</a:t>
@@ -39079,6 +39331,7 @@
                   <a:srgbClr val="1B3B6F"/>
                 </a:solidFill>
                 <a:latin typeface="Amiri" pitchFamily="2" charset="-78"/>
+                <a:ea typeface="Amiri" pitchFamily="2" charset="-78"/>
                 <a:cs typeface="Amiri" pitchFamily="2" charset="-78"/>
               </a:rPr>
               <a:t>التِّجَارَةُ الدُّوَلِيَّةُ</a:t>
@@ -39236,6 +39489,7 @@
                   <a:srgbClr val="1B3B6F"/>
                 </a:solidFill>
                 <a:latin typeface="Amiri" pitchFamily="2" charset="-78"/>
+                <a:ea typeface="Amiri" pitchFamily="2" charset="-78"/>
                 <a:cs typeface="Amiri" pitchFamily="2" charset="-78"/>
               </a:rPr>
               <a:t>التَّصْدِيرُ</a:t>
@@ -39339,6 +39593,7 @@
                   <a:srgbClr val="1B3B6F"/>
                 </a:solidFill>
                 <a:latin typeface="Amiri" pitchFamily="2" charset="-78"/>
+                <a:ea typeface="Amiri" pitchFamily="2" charset="-78"/>
                 <a:cs typeface="Amiri" pitchFamily="2" charset="-78"/>
               </a:rPr>
               <a:t>الاسْتِيرَادُ</a:t>
@@ -39604,6 +39859,7 @@
                   <a:srgbClr val="1B3B6F"/>
                 </a:solidFill>
                 <a:latin typeface="Amiri" pitchFamily="2" charset="-78"/>
+                <a:ea typeface="Amiri" pitchFamily="2" charset="-78"/>
                 <a:cs typeface="Amiri" pitchFamily="2" charset="-78"/>
               </a:rPr>
               <a:t>التَّعَاوُنُ الدُّوَلِيُّ</a:t>
@@ -39761,6 +40017,7 @@
                   <a:srgbClr val="1B3B6F"/>
                 </a:solidFill>
                 <a:latin typeface="Amiri" pitchFamily="2" charset="-78"/>
+                <a:ea typeface="Amiri" pitchFamily="2" charset="-78"/>
                 <a:cs typeface="Amiri" pitchFamily="2" charset="-78"/>
               </a:rPr>
               <a:t>السَّلَامُ</a:t>
@@ -39864,6 +40121,7 @@
                   <a:srgbClr val="1B3B6F"/>
                 </a:solidFill>
                 <a:latin typeface="Amiri" pitchFamily="2" charset="-78"/>
+                <a:ea typeface="Amiri" pitchFamily="2" charset="-78"/>
                 <a:cs typeface="Amiri" pitchFamily="2" charset="-78"/>
               </a:rPr>
               <a:t>التَّضَامُنُ</a:t>
@@ -39997,6 +40255,7 @@
                   <a:srgbClr val="D4AF37"/>
                 </a:solidFill>
                 <a:latin typeface="Amiri" pitchFamily="2" charset="-78"/>
+                <a:ea typeface="Amiri" pitchFamily="2" charset="-78"/>
                 <a:cs typeface="Amiri" pitchFamily="2" charset="-78"/>
               </a:rPr>
               <a:t>م</a:t>
@@ -40317,6 +40576,7 @@
                   <a:srgbClr val="8A6D1E"/>
                 </a:solidFill>
                 <a:latin typeface="Amiri" pitchFamily="2" charset="-78"/>
+                <a:ea typeface="Amiri" pitchFamily="2" charset="-78"/>
                 <a:cs typeface="Amiri" pitchFamily="2" charset="-78"/>
               </a:rPr>
               <a:t>فِي الغُرَفِ</a:t>
@@ -41493,6 +41753,7 @@
                   <a:srgbClr val="1B3B6F"/>
                 </a:solidFill>
                 <a:latin typeface="Amiri" pitchFamily="2" charset="-78"/>
+                <a:ea typeface="Amiri" pitchFamily="2" charset="-78"/>
                 <a:cs typeface="Amiri" pitchFamily="2" charset="-78"/>
               </a:rPr>
               <a:t>دَوْرُكَ!</a:t>
@@ -41569,6 +41830,7 @@
                   <a:srgbClr val="1B3B6F"/>
                 </a:solidFill>
                 <a:latin typeface="Amiri" pitchFamily="2" charset="-78"/>
+                <a:ea typeface="Amiri" pitchFamily="2" charset="-78"/>
                 <a:cs typeface="Amiri" pitchFamily="2" charset="-78"/>
               </a:rPr>
               <a:t>أَحْسَنْتَ! / أَحْسَنْتِ!</a:t>
@@ -41645,6 +41907,7 @@
                   <a:srgbClr val="1B3B6F"/>
                 </a:solidFill>
                 <a:latin typeface="Amiri" pitchFamily="2" charset="-78"/>
+                <a:ea typeface="Amiri" pitchFamily="2" charset="-78"/>
                 <a:cs typeface="Amiri" pitchFamily="2" charset="-78"/>
               </a:rPr>
               <a:t>تَكَلَّمْ أَكْثَرَ، مِنْ فَضْلِكَ</a:t>
@@ -41721,6 +41984,7 @@
                   <a:srgbClr val="1B3B6F"/>
                 </a:solidFill>
                 <a:latin typeface="Amiri" pitchFamily="2" charset="-78"/>
+                <a:ea typeface="Amiri" pitchFamily="2" charset="-78"/>
                 <a:cs typeface="Amiri" pitchFamily="2" charset="-78"/>
               </a:rPr>
               <a:t>لِمَاذَا؟</a:t>
@@ -41892,6 +42156,7 @@
                   <a:srgbClr val="D4AF37"/>
                 </a:solidFill>
                 <a:latin typeface="Amiri" pitchFamily="2" charset="-78"/>
+                <a:ea typeface="Amiri" pitchFamily="2" charset="-78"/>
                 <a:cs typeface="Amiri" pitchFamily="2" charset="-78"/>
               </a:rPr>
               <a:t>م</a:t>
@@ -42212,6 +42477,7 @@
                   <a:srgbClr val="8A6D1E"/>
                 </a:solidFill>
                 <a:latin typeface="Amiri" pitchFamily="2" charset="-78"/>
+                <a:ea typeface="Amiri" pitchFamily="2" charset="-78"/>
                 <a:cs typeface="Amiri" pitchFamily="2" charset="-78"/>
               </a:rPr>
               <a:t>نَادِي نَمُوذَجِ الأُمَمِ المُتَّحِدَةِ</a:t>
@@ -42492,6 +42758,7 @@
                   <a:srgbClr val="1B3B6F"/>
                 </a:solidFill>
                 <a:latin typeface="Amiri" pitchFamily="2" charset="-78"/>
+                <a:ea typeface="Amiri" pitchFamily="2" charset="-78"/>
                 <a:cs typeface="Amiri" pitchFamily="2" charset="-78"/>
               </a:rPr>
               <a:t>لِأَنِّي أُحِبُّ …</a:t>
@@ -42568,6 +42835,7 @@
                   <a:srgbClr val="1B3B6F"/>
                 </a:solidFill>
                 <a:latin typeface="Amiri" pitchFamily="2" charset="-78"/>
+                <a:ea typeface="Amiri" pitchFamily="2" charset="-78"/>
                 <a:cs typeface="Amiri" pitchFamily="2" charset="-78"/>
               </a:rPr>
               <a:t>أَهْلًا! لِمَاذَا تُرِيدُ أَنْ تَنْضَمَّ إِلَى النَّادِي؟</a:t>
@@ -42736,6 +43004,7 @@
                   <a:srgbClr val="1B3B6F"/>
                 </a:solidFill>
                 <a:latin typeface="Amiri" pitchFamily="2" charset="-78"/>
+                <a:ea typeface="Amiri" pitchFamily="2" charset="-78"/>
                 <a:cs typeface="Amiri" pitchFamily="2" charset="-78"/>
               </a:rPr>
               <a:t>أَتَكَلَّمُ …</a:t>
@@ -42812,6 +43081,7 @@
                   <a:srgbClr val="1B3B6F"/>
                 </a:solidFill>
                 <a:latin typeface="Amiri" pitchFamily="2" charset="-78"/>
+                <a:ea typeface="Amiri" pitchFamily="2" charset="-78"/>
                 <a:cs typeface="Amiri" pitchFamily="2" charset="-78"/>
               </a:rPr>
               <a:t>مَا اللُّغَاتُ الَّتِي تَتَكَلَّمُهَا؟</a:t>
@@ -42980,6 +43250,7 @@
                   <a:srgbClr val="1B3B6F"/>
                 </a:solidFill>
                 <a:latin typeface="Amiri" pitchFamily="2" charset="-78"/>
+                <a:ea typeface="Amiri" pitchFamily="2" charset="-78"/>
                 <a:cs typeface="Amiri" pitchFamily="2" charset="-78"/>
               </a:rPr>
               <a:t>أُرِيدُ أَنْ أُمَثِّلَ …</a:t>
@@ -43056,6 +43327,7 @@
                   <a:srgbClr val="1B3B6F"/>
                 </a:solidFill>
                 <a:latin typeface="Amiri" pitchFamily="2" charset="-78"/>
+                <a:ea typeface="Amiri" pitchFamily="2" charset="-78"/>
                 <a:cs typeface="Amiri" pitchFamily="2" charset="-78"/>
               </a:rPr>
               <a:t>أَيَّ بَلَدٍ تُرِيدُ أَنْ تُمَثِّلَ؟</a:t>
@@ -43224,6 +43496,7 @@
                   <a:srgbClr val="1B3B6F"/>
                 </a:solidFill>
                 <a:latin typeface="Amiri" pitchFamily="2" charset="-78"/>
+                <a:ea typeface="Amiri" pitchFamily="2" charset="-78"/>
                 <a:cs typeface="Amiri" pitchFamily="2" charset="-78"/>
               </a:rPr>
               <a:t>أَيْنَ …؟</a:t>
@@ -43300,6 +43573,7 @@
                   <a:srgbClr val="1B3B6F"/>
                 </a:solidFill>
                 <a:latin typeface="Amiri" pitchFamily="2" charset="-78"/>
+                <a:ea typeface="Amiri" pitchFamily="2" charset="-78"/>
                 <a:cs typeface="Amiri" pitchFamily="2" charset="-78"/>
               </a:rPr>
               <a:t>جَيِّدٌ. المُؤْتَمَرُ فِي مَارِسَ.</a:t>
@@ -43468,6 +43742,7 @@
                   <a:srgbClr val="1B3B6F"/>
                 </a:solidFill>
                 <a:latin typeface="Amiri" pitchFamily="2" charset="-78"/>
+                <a:ea typeface="Amiri" pitchFamily="2" charset="-78"/>
                 <a:cs typeface="Amiri" pitchFamily="2" charset="-78"/>
               </a:rPr>
               <a:t>أَهَمُّ قَضِيَّةٍ … لِأَنَّ …</a:t>
@@ -43544,6 +43819,7 @@
                   <a:srgbClr val="1B3B6F"/>
                 </a:solidFill>
                 <a:latin typeface="Amiri" pitchFamily="2" charset="-78"/>
+                <a:ea typeface="Amiri" pitchFamily="2" charset="-78"/>
                 <a:cs typeface="Amiri" pitchFamily="2" charset="-78"/>
               </a:rPr>
               <a:t>فِي لَنْدَنَ. مَا القَضِيَّةُ العَالَمِيَّةُ الأَهَمُّ فِي رَأْيِكَ؟</a:t>
@@ -43818,6 +44094,7 @@
                   <a:srgbClr val="D4AF37"/>
                 </a:solidFill>
                 <a:latin typeface="Amiri" pitchFamily="2" charset="-78"/>
+                <a:ea typeface="Amiri" pitchFamily="2" charset="-78"/>
                 <a:cs typeface="Amiri" pitchFamily="2" charset="-78"/>
               </a:rPr>
               <a:t>م</a:t>
@@ -44138,6 +44415,7 @@
                   <a:srgbClr val="8A6D1E"/>
                 </a:solidFill>
                 <a:latin typeface="Amiri" pitchFamily="2" charset="-78"/>
+                <a:ea typeface="Amiri" pitchFamily="2" charset="-78"/>
                 <a:cs typeface="Amiri" pitchFamily="2" charset="-78"/>
               </a:rPr>
               <a:t>أَيْنَ صُنِعَ؟</a:t>
@@ -44418,6 +44696,7 @@
                   <a:srgbClr val="1B3B6F"/>
                 </a:solidFill>
                 <a:latin typeface="Amiri" pitchFamily="2" charset="-78"/>
+                <a:ea typeface="Amiri" pitchFamily="2" charset="-78"/>
                 <a:cs typeface="Amiri" pitchFamily="2" charset="-78"/>
               </a:rPr>
               <a:t>صُنِعَ فِي …</a:t>
@@ -44494,6 +44773,7 @@
                   <a:srgbClr val="1B3B6F"/>
                 </a:solidFill>
                 <a:latin typeface="Amiri" pitchFamily="2" charset="-78"/>
+                <a:ea typeface="Amiri" pitchFamily="2" charset="-78"/>
                 <a:cs typeface="Amiri" pitchFamily="2" charset="-78"/>
               </a:rPr>
               <a:t>هَاتِفُكَ جَدِيدٌ! أَيْنَ صُنِعَ؟</a:t>
@@ -44662,6 +44942,7 @@
                   <a:srgbClr val="1B3B6F"/>
                 </a:solidFill>
                 <a:latin typeface="Amiri" pitchFamily="2" charset="-78"/>
+                <a:ea typeface="Amiri" pitchFamily="2" charset="-78"/>
                 <a:cs typeface="Amiri" pitchFamily="2" charset="-78"/>
               </a:rPr>
               <a:t>صُنِعَ فِي … مِنَ …</a:t>
@@ -44738,6 +45019,7 @@
                   <a:srgbClr val="1B3B6F"/>
                 </a:solidFill>
                 <a:latin typeface="Amiri" pitchFamily="2" charset="-78"/>
+                <a:ea typeface="Amiri" pitchFamily="2" charset="-78"/>
                 <a:cs typeface="Amiri" pitchFamily="2" charset="-78"/>
               </a:rPr>
               <a:t>وَهٰذَا القَمِيصُ؟</a:t>
@@ -44906,6 +45188,7 @@
                   <a:srgbClr val="1B3B6F"/>
                 </a:solidFill>
                 <a:latin typeface="Amiri" pitchFamily="2" charset="-78"/>
+                <a:ea typeface="Amiri" pitchFamily="2" charset="-78"/>
                 <a:cs typeface="Amiri" pitchFamily="2" charset="-78"/>
               </a:rPr>
               <a:t>نَعَمْ، لِأَنَّ … أَحْيَانًا …</a:t>
@@ -44982,6 +45265,7 @@
                   <a:srgbClr val="1B3B6F"/>
                 </a:solidFill>
                 <a:latin typeface="Amiri" pitchFamily="2" charset="-78"/>
+                <a:ea typeface="Amiri" pitchFamily="2" charset="-78"/>
                 <a:cs typeface="Amiri" pitchFamily="2" charset="-78"/>
               </a:rPr>
               <a:t>هَلْ يُهِمُّكَ أَيْنَ تُصْنَعُ مَلَابِسُكَ؟</a:t>
@@ -45085,6 +45369,7 @@
                   <a:srgbClr val="1B3B6F"/>
                 </a:solidFill>
                 <a:latin typeface="Amiri" pitchFamily="2" charset="-78"/>
+                <a:ea typeface="Amiri" pitchFamily="2" charset="-78"/>
                 <a:cs typeface="Amiri" pitchFamily="2" charset="-78"/>
               </a:rPr>
               <a:t>إِذَا اشْتَرَيْنَا … فَسَنُسَاعِدُ … ؛ مَا رَأْيُكَ؟</a:t>
@@ -45161,6 +45446,7 @@
                   <a:srgbClr val="1B3B6F"/>
                 </a:solidFill>
                 <a:latin typeface="Amiri" pitchFamily="2" charset="-78"/>
+                <a:ea typeface="Amiri" pitchFamily="2" charset="-78"/>
                 <a:cs typeface="Amiri" pitchFamily="2" charset="-78"/>
               </a:rPr>
               <a:t>إِذَنْ مَاذَا نَفْعَلُ؟</a:t>
@@ -45264,6 +45550,7 @@
                   <a:srgbClr val="1B3B6F"/>
                 </a:solidFill>
                 <a:latin typeface="Amiri" pitchFamily="2" charset="-78"/>
+                <a:ea typeface="Amiri" pitchFamily="2" charset="-78"/>
                 <a:cs typeface="Amiri" pitchFamily="2" charset="-78"/>
               </a:rPr>
               <a:t>نَعَمْ / أَحْيَانًا، … لِأَنَّ …</a:t>
@@ -45340,6 +45627,7 @@
                   <a:srgbClr val="1B3B6F"/>
                 </a:solidFill>
                 <a:latin typeface="Amiri" pitchFamily="2" charset="-78"/>
+                <a:ea typeface="Amiri" pitchFamily="2" charset="-78"/>
                 <a:cs typeface="Amiri" pitchFamily="2" charset="-78"/>
               </a:rPr>
               <a:t>فِكْرَةٌ جَيِّدَةٌ. هَلْ تَشْتَرِي مَلَابِسَ مُسْتَعْمَلَةً؟</a:t>
@@ -45514,13 +45802,9 @@
     <a:fontScheme name="Office">
       <a:majorFont>
         <a:latin typeface="Calibri Light" panose="020F0302020204030204"/>
-        <a:ea typeface=""/>
-        <a:cs typeface=""/>
-        <a:font script="Jpan" typeface="游ゴシック Light"/>
-        <a:font script="Hang" typeface="맑은 고딕"/>
-        <a:font script="Hans" typeface="等线 Light"/>
-        <a:font script="Hant" typeface="新細明體"/>
-        <a:font script="Arab" typeface="Times New Roman"/>
+        <a:ea typeface="Amiri" pitchFamily="2" charset="-78"/>
+        <a:cs typeface="Amiri" pitchFamily="2" charset="-78"/>
+        <a:font script="Arab" typeface="Amiri"/>
         <a:font script="Hebr" typeface="Times New Roman"/>
         <a:font script="Thai" typeface="Angsana New"/>
         <a:font script="Ethi" typeface="Nyala"/>
@@ -45566,13 +45850,9 @@
       </a:majorFont>
       <a:minorFont>
         <a:latin typeface="Calibri" panose="020F0502020204030204"/>
-        <a:ea typeface=""/>
-        <a:cs typeface=""/>
-        <a:font script="Jpan" typeface="游ゴシック"/>
-        <a:font script="Hang" typeface="맑은 고딕"/>
-        <a:font script="Hans" typeface="等线"/>
-        <a:font script="Hant" typeface="新細明體"/>
-        <a:font script="Arab" typeface="Arial"/>
+        <a:ea typeface="Amiri" pitchFamily="2" charset="-78"/>
+        <a:cs typeface="Amiri" pitchFamily="2" charset="-78"/>
+        <a:font script="Arab" typeface="Amiri"/>
         <a:font script="Hebr" typeface="Arial"/>
         <a:font script="Thai" typeface="Cordia New"/>
         <a:font script="Ethi" typeface="Nyala"/>
